--- a/resources/slides/03_technology.pptx
+++ b/resources/slides/03_technology.pptx
@@ -5,29 +5,32 @@
     <p:sldMasterId id="2147483648" r:id="rId1"/>
   </p:sldMasterIdLst>
   <p:notesMasterIdLst>
-    <p:notesMasterId r:id="rId22"/>
+    <p:notesMasterId r:id="rId25"/>
   </p:notesMasterIdLst>
   <p:sldIdLst>
     <p:sldId id="256" r:id="rId2"/>
     <p:sldId id="257" r:id="rId3"/>
     <p:sldId id="259" r:id="rId4"/>
-    <p:sldId id="258" r:id="rId5"/>
-    <p:sldId id="260" r:id="rId6"/>
-    <p:sldId id="261" r:id="rId7"/>
-    <p:sldId id="262" r:id="rId8"/>
-    <p:sldId id="263" r:id="rId9"/>
-    <p:sldId id="264" r:id="rId10"/>
-    <p:sldId id="265" r:id="rId11"/>
-    <p:sldId id="266" r:id="rId12"/>
-    <p:sldId id="267" r:id="rId13"/>
-    <p:sldId id="268" r:id="rId14"/>
-    <p:sldId id="269" r:id="rId15"/>
-    <p:sldId id="276" r:id="rId16"/>
-    <p:sldId id="270" r:id="rId17"/>
-    <p:sldId id="271" r:id="rId18"/>
-    <p:sldId id="274" r:id="rId19"/>
-    <p:sldId id="272" r:id="rId20"/>
-    <p:sldId id="273" r:id="rId21"/>
+    <p:sldId id="277" r:id="rId5"/>
+    <p:sldId id="258" r:id="rId6"/>
+    <p:sldId id="260" r:id="rId7"/>
+    <p:sldId id="261" r:id="rId8"/>
+    <p:sldId id="262" r:id="rId9"/>
+    <p:sldId id="263" r:id="rId10"/>
+    <p:sldId id="264" r:id="rId11"/>
+    <p:sldId id="278" r:id="rId12"/>
+    <p:sldId id="265" r:id="rId13"/>
+    <p:sldId id="266" r:id="rId14"/>
+    <p:sldId id="267" r:id="rId15"/>
+    <p:sldId id="268" r:id="rId16"/>
+    <p:sldId id="269" r:id="rId17"/>
+    <p:sldId id="276" r:id="rId18"/>
+    <p:sldId id="270" r:id="rId19"/>
+    <p:sldId id="271" r:id="rId20"/>
+    <p:sldId id="279" r:id="rId21"/>
+    <p:sldId id="274" r:id="rId22"/>
+    <p:sldId id="272" r:id="rId23"/>
+    <p:sldId id="273" r:id="rId24"/>
   </p:sldIdLst>
   <p:sldSz cx="12192000" cy="6858000"/>
   <p:notesSz cx="6858000" cy="9144000"/>
@@ -216,7 +219,7 @@
           <a:p>
             <a:fld id="{2D2CAE3E-F9B4-C94A-AABF-8CE1CAEC439F}" type="datetimeFigureOut">
               <a:rPr lang="en-US" smtClean="0"/>
-              <a:t>8/6/26</a:t>
+              <a:t>9/12/26</a:t>
             </a:fld>
             <a:endParaRPr lang="en-US"/>
           </a:p>
@@ -738,7 +741,7 @@
           <a:p>
             <a:fld id="{CC015439-64B1-CE4E-8D65-9A05746CEBEF}" type="datetimeFigureOut">
               <a:rPr lang="en-US" smtClean="0"/>
-              <a:t>8/6/26</a:t>
+              <a:t>9/12/26</a:t>
             </a:fld>
             <a:endParaRPr lang="en-US"/>
           </a:p>
@@ -842,6 +845,260 @@
 </file>
 
 <file path=ppt/slideLayouts/slideLayout2.xml><?xml version="1.0" encoding="utf-8"?>
+<p:sldLayout xmlns:a="http://schemas.openxmlformats.org/drawingml/2006/main" xmlns:r="http://schemas.openxmlformats.org/officeDocument/2006/relationships" xmlns:p="http://schemas.openxmlformats.org/presentationml/2006/main" preserve="1" userDrawn="1">
+  <p:cSld name="1_Title Slide">
+    <p:spTree>
+      <p:nvGrpSpPr>
+        <p:cNvPr id="1" name=""/>
+        <p:cNvGrpSpPr/>
+        <p:nvPr/>
+      </p:nvGrpSpPr>
+      <p:grpSpPr>
+        <a:xfrm>
+          <a:off x="0" y="0"/>
+          <a:ext cx="0" cy="0"/>
+          <a:chOff x="0" y="0"/>
+          <a:chExt cx="0" cy="0"/>
+        </a:xfrm>
+      </p:grpSpPr>
+      <p:sp>
+        <p:nvSpPr>
+          <p:cNvPr id="7" name="Rectangle 6">
+            <a:extLst>
+              <a:ext uri="{FF2B5EF4-FFF2-40B4-BE49-F238E27FC236}">
+                <a16:creationId xmlns:a16="http://schemas.microsoft.com/office/drawing/2014/main" id="{A07BDD6A-1823-8EBE-4339-8BE6A00F709B}"/>
+              </a:ext>
+            </a:extLst>
+          </p:cNvPr>
+          <p:cNvSpPr/>
+          <p:nvPr userDrawn="1"/>
+        </p:nvSpPr>
+        <p:spPr>
+          <a:xfrm>
+            <a:off x="0" y="1600201"/>
+            <a:ext cx="12192000" cy="2412586"/>
+          </a:xfrm>
+          <a:prstGeom prst="rect">
+            <a:avLst/>
+          </a:prstGeom>
+          <a:solidFill>
+            <a:srgbClr val="2F5592"/>
+          </a:solidFill>
+          <a:ln>
+            <a:noFill/>
+          </a:ln>
+        </p:spPr>
+        <p:style>
+          <a:lnRef idx="2">
+            <a:schemeClr val="accent1">
+              <a:shade val="15000"/>
+            </a:schemeClr>
+          </a:lnRef>
+          <a:fillRef idx="1">
+            <a:schemeClr val="accent1"/>
+          </a:fillRef>
+          <a:effectRef idx="0">
+            <a:schemeClr val="accent1"/>
+          </a:effectRef>
+          <a:fontRef idx="minor">
+            <a:schemeClr val="lt1"/>
+          </a:fontRef>
+        </p:style>
+        <p:txBody>
+          <a:bodyPr rtlCol="0" anchor="ctr"/>
+          <a:lstStyle/>
+          <a:p>
+            <a:pPr algn="ctr"/>
+            <a:endParaRPr lang="en-US"/>
+          </a:p>
+        </p:txBody>
+      </p:sp>
+      <p:sp>
+        <p:nvSpPr>
+          <p:cNvPr id="2" name="Title 1">
+            <a:extLst>
+              <a:ext uri="{FF2B5EF4-FFF2-40B4-BE49-F238E27FC236}">
+                <a16:creationId xmlns:a16="http://schemas.microsoft.com/office/drawing/2014/main" id="{906FEA07-9D5A-E087-CD0F-85CD617F7122}"/>
+              </a:ext>
+            </a:extLst>
+          </p:cNvPr>
+          <p:cNvSpPr>
+            <a:spLocks noGrp="1"/>
+          </p:cNvSpPr>
+          <p:nvPr>
+            <p:ph type="ctrTitle"/>
+          </p:nvPr>
+        </p:nvSpPr>
+        <p:spPr>
+          <a:xfrm>
+            <a:off x="1524000" y="1625187"/>
+            <a:ext cx="9144000" cy="2387600"/>
+          </a:xfrm>
+        </p:spPr>
+        <p:txBody>
+          <a:bodyPr anchor="ctr"/>
+          <a:lstStyle>
+            <a:lvl1pPr algn="ctr">
+              <a:defRPr sz="5400"/>
+            </a:lvl1pPr>
+          </a:lstStyle>
+          <a:p>
+            <a:r>
+              <a:rPr lang="en-US" dirty="0"/>
+              <a:t>Click to edit Master title style</a:t>
+            </a:r>
+          </a:p>
+        </p:txBody>
+      </p:sp>
+      <p:sp>
+        <p:nvSpPr>
+          <p:cNvPr id="4" name="Date Placeholder 3">
+            <a:extLst>
+              <a:ext uri="{FF2B5EF4-FFF2-40B4-BE49-F238E27FC236}">
+                <a16:creationId xmlns:a16="http://schemas.microsoft.com/office/drawing/2014/main" id="{27618ECE-1E6D-F8F2-58B1-71D7BE74C0F9}"/>
+              </a:ext>
+            </a:extLst>
+          </p:cNvPr>
+          <p:cNvSpPr>
+            <a:spLocks noGrp="1"/>
+          </p:cNvSpPr>
+          <p:nvPr>
+            <p:ph type="dt" sz="half" idx="10"/>
+          </p:nvPr>
+        </p:nvSpPr>
+        <p:spPr/>
+        <p:txBody>
+          <a:bodyPr/>
+          <a:lstStyle/>
+          <a:p>
+            <a:fld id="{CC015439-64B1-CE4E-8D65-9A05746CEBEF}" type="datetimeFigureOut">
+              <a:rPr lang="en-US" smtClean="0"/>
+              <a:t>9/12/26</a:t>
+            </a:fld>
+            <a:endParaRPr lang="en-US"/>
+          </a:p>
+        </p:txBody>
+      </p:sp>
+      <p:sp>
+        <p:nvSpPr>
+          <p:cNvPr id="5" name="Footer Placeholder 4">
+            <a:extLst>
+              <a:ext uri="{FF2B5EF4-FFF2-40B4-BE49-F238E27FC236}">
+                <a16:creationId xmlns:a16="http://schemas.microsoft.com/office/drawing/2014/main" id="{B6D2AB94-E371-30E1-1464-0D57E5C45DBB}"/>
+              </a:ext>
+            </a:extLst>
+          </p:cNvPr>
+          <p:cNvSpPr>
+            <a:spLocks noGrp="1"/>
+          </p:cNvSpPr>
+          <p:nvPr>
+            <p:ph type="ftr" sz="quarter" idx="11"/>
+          </p:nvPr>
+        </p:nvSpPr>
+        <p:spPr/>
+        <p:txBody>
+          <a:bodyPr/>
+          <a:lstStyle/>
+          <a:p>
+            <a:endParaRPr lang="en-US"/>
+          </a:p>
+        </p:txBody>
+      </p:sp>
+      <p:sp>
+        <p:nvSpPr>
+          <p:cNvPr id="6" name="Slide Number Placeholder 5">
+            <a:extLst>
+              <a:ext uri="{FF2B5EF4-FFF2-40B4-BE49-F238E27FC236}">
+                <a16:creationId xmlns:a16="http://schemas.microsoft.com/office/drawing/2014/main" id="{339C57B5-7F35-E930-6BE6-D1855198237E}"/>
+              </a:ext>
+            </a:extLst>
+          </p:cNvPr>
+          <p:cNvSpPr>
+            <a:spLocks noGrp="1"/>
+          </p:cNvSpPr>
+          <p:nvPr>
+            <p:ph type="sldNum" sz="quarter" idx="12"/>
+          </p:nvPr>
+        </p:nvSpPr>
+        <p:spPr/>
+        <p:txBody>
+          <a:bodyPr/>
+          <a:lstStyle/>
+          <a:p>
+            <a:fld id="{394597B6-99AE-8F4E-8AC4-338DBFD9B0E5}" type="slidenum">
+              <a:rPr lang="en-US" smtClean="0"/>
+              <a:t>‹#›</a:t>
+            </a:fld>
+            <a:endParaRPr lang="en-US"/>
+          </a:p>
+        </p:txBody>
+      </p:sp>
+      <p:sp>
+        <p:nvSpPr>
+          <p:cNvPr id="9" name="Rectangle 8">
+            <a:extLst>
+              <a:ext uri="{FF2B5EF4-FFF2-40B4-BE49-F238E27FC236}">
+                <a16:creationId xmlns:a16="http://schemas.microsoft.com/office/drawing/2014/main" id="{061D39B3-5E5D-0F11-FC35-6F2C9B63E066}"/>
+              </a:ext>
+            </a:extLst>
+          </p:cNvPr>
+          <p:cNvSpPr/>
+          <p:nvPr userDrawn="1"/>
+        </p:nvSpPr>
+        <p:spPr>
+          <a:xfrm>
+            <a:off x="0" y="-1813"/>
+            <a:ext cx="12192000" cy="1400215"/>
+          </a:xfrm>
+          <a:prstGeom prst="rect">
+            <a:avLst/>
+          </a:prstGeom>
+          <a:solidFill>
+            <a:schemeClr val="bg1"/>
+          </a:solidFill>
+          <a:ln>
+            <a:noFill/>
+          </a:ln>
+        </p:spPr>
+        <p:style>
+          <a:lnRef idx="2">
+            <a:schemeClr val="accent1">
+              <a:shade val="15000"/>
+            </a:schemeClr>
+          </a:lnRef>
+          <a:fillRef idx="1">
+            <a:schemeClr val="accent1"/>
+          </a:fillRef>
+          <a:effectRef idx="0">
+            <a:schemeClr val="accent1"/>
+          </a:effectRef>
+          <a:fontRef idx="minor">
+            <a:schemeClr val="lt1"/>
+          </a:fontRef>
+        </p:style>
+        <p:txBody>
+          <a:bodyPr rtlCol="0" anchor="ctr"/>
+          <a:lstStyle/>
+          <a:p>
+            <a:pPr algn="ctr"/>
+            <a:endParaRPr lang="en-US"/>
+          </a:p>
+        </p:txBody>
+      </p:sp>
+    </p:spTree>
+    <p:extLst>
+      <p:ext uri="{BB962C8B-B14F-4D97-AF65-F5344CB8AC3E}">
+        <p14:creationId xmlns:p14="http://schemas.microsoft.com/office/powerpoint/2010/main" val="3318984598"/>
+      </p:ext>
+    </p:extLst>
+  </p:cSld>
+  <p:clrMapOvr>
+    <a:masterClrMapping/>
+  </p:clrMapOvr>
+</p:sldLayout>
+</file>
+
+<file path=ppt/slideLayouts/slideLayout3.xml><?xml version="1.0" encoding="utf-8"?>
 <p:sldLayout xmlns:a="http://schemas.openxmlformats.org/drawingml/2006/main" xmlns:r="http://schemas.openxmlformats.org/officeDocument/2006/relationships" xmlns:p="http://schemas.openxmlformats.org/presentationml/2006/main" type="obj" preserve="1">
   <p:cSld name="Title and Content">
     <p:spTree>
@@ -966,7 +1223,7 @@
           <a:p>
             <a:fld id="{CC015439-64B1-CE4E-8D65-9A05746CEBEF}" type="datetimeFigureOut">
               <a:rPr lang="en-US" smtClean="0"/>
-              <a:t>8/6/26</a:t>
+              <a:t>9/12/26</a:t>
             </a:fld>
             <a:endParaRPr lang="en-US"/>
           </a:p>
@@ -1039,7 +1296,7 @@
 </p:sldLayout>
 </file>
 
-<file path=ppt/slideLayouts/slideLayout3.xml><?xml version="1.0" encoding="utf-8"?>
+<file path=ppt/slideLayouts/slideLayout4.xml><?xml version="1.0" encoding="utf-8"?>
 <p:sldLayout xmlns:a="http://schemas.openxmlformats.org/drawingml/2006/main" xmlns:r="http://schemas.openxmlformats.org/officeDocument/2006/relationships" xmlns:p="http://schemas.openxmlformats.org/presentationml/2006/main" type="twoObj" preserve="1">
   <p:cSld name="Two Content">
     <p:spTree>
@@ -1231,7 +1488,7 @@
           <a:p>
             <a:fld id="{CC015439-64B1-CE4E-8D65-9A05746CEBEF}" type="datetimeFigureOut">
               <a:rPr lang="en-US" smtClean="0"/>
-              <a:t>8/6/26</a:t>
+              <a:t>9/12/26</a:t>
             </a:fld>
             <a:endParaRPr lang="en-US"/>
           </a:p>
@@ -1304,7 +1561,7 @@
 </p:sldLayout>
 </file>
 
-<file path=ppt/slideLayouts/slideLayout4.xml><?xml version="1.0" encoding="utf-8"?>
+<file path=ppt/slideLayouts/slideLayout5.xml><?xml version="1.0" encoding="utf-8"?>
 <p:sldLayout xmlns:a="http://schemas.openxmlformats.org/drawingml/2006/main" xmlns:r="http://schemas.openxmlformats.org/officeDocument/2006/relationships" xmlns:p="http://schemas.openxmlformats.org/presentationml/2006/main" type="titleOnly" preserve="1">
   <p:cSld name="Title Only">
     <p:spTree>
@@ -1372,7 +1629,7 @@
           <a:p>
             <a:fld id="{CC015439-64B1-CE4E-8D65-9A05746CEBEF}" type="datetimeFigureOut">
               <a:rPr lang="en-US" smtClean="0"/>
-              <a:t>8/6/26</a:t>
+              <a:t>9/12/26</a:t>
             </a:fld>
             <a:endParaRPr lang="en-US"/>
           </a:p>
@@ -1575,7 +1832,7 @@
           <a:p>
             <a:fld id="{CC015439-64B1-CE4E-8D65-9A05746CEBEF}" type="datetimeFigureOut">
               <a:rPr lang="en-US" smtClean="0"/>
-              <a:t>8/6/26</a:t>
+              <a:t>9/12/26</a:t>
             </a:fld>
             <a:endParaRPr lang="en-US"/>
           </a:p>
@@ -1771,9 +2028,10 @@
   <p:clrMap bg1="lt1" tx1="dk1" bg2="lt2" tx2="dk2" accent1="accent1" accent2="accent2" accent3="accent3" accent4="accent4" accent5="accent5" accent6="accent6" hlink="hlink" folHlink="folHlink"/>
   <p:sldLayoutIdLst>
     <p:sldLayoutId id="2147483649" r:id="rId1"/>
-    <p:sldLayoutId id="2147483650" r:id="rId2"/>
-    <p:sldLayoutId id="2147483652" r:id="rId3"/>
-    <p:sldLayoutId id="2147483654" r:id="rId4"/>
+    <p:sldLayoutId id="2147483655" r:id="rId2"/>
+    <p:sldLayoutId id="2147483650" r:id="rId3"/>
+    <p:sldLayoutId id="2147483652" r:id="rId4"/>
+    <p:sldLayoutId id="2147483654" r:id="rId5"/>
   </p:sldLayoutIdLst>
   <p:txStyles>
     <p:titleStyle>
@@ -2169,11 +2427,11 @@
           <a:p>
             <a:r>
               <a:rPr dirty="0"/>
-              <a:t>Packet Switch</a:t>
-            </a:r>
-            <a:r>
-              <a:rPr lang="en-US" dirty="0"/>
-              <a:t>es</a:t>
+              <a:t>Evolution</a:t>
+            </a:r>
+            <a:r>
+              <a:rPr lang="en-US" dirty="0"/>
+              <a:t> of Ethernet</a:t>
             </a:r>
             <a:endParaRPr dirty="0"/>
           </a:p>
@@ -2191,8 +2449,8 @@
         </p:nvSpPr>
         <p:spPr>
           <a:xfrm>
-            <a:off x="838200" y="1548225"/>
-            <a:ext cx="10515600" cy="4952588"/>
+            <a:off x="838200" y="1271588"/>
+            <a:ext cx="10515600" cy="5300661"/>
           </a:xfrm>
         </p:spPr>
         <p:txBody>
@@ -2202,94 +2460,148 @@
           <a:lstStyle/>
           <a:p>
             <a:r>
-              <a:rPr lang="en-US" dirty="0"/>
-              <a:t>Building block of the Internet</a:t>
-            </a:r>
-          </a:p>
-          <a:p>
-            <a:pPr lvl="1"/>
-            <a:r>
-              <a:rPr lang="en-US" dirty="0"/>
-              <a:t>Switches are to Networking as Servers are to Computing</a:t>
-            </a:r>
-          </a:p>
-          <a:p>
-            <a:pPr lvl="1"/>
-            <a:r>
-              <a:rPr lang="en-US" dirty="0"/>
-              <a:t>Where functionality described in Part II is implemented</a:t>
-            </a:r>
-          </a:p>
-          <a:p>
-            <a:r>
-              <a:rPr lang="en-US" dirty="0"/>
-              <a:t>Common Platform</a:t>
-            </a:r>
-          </a:p>
-          <a:p>
-            <a:pPr lvl="1"/>
-            <a:r>
-              <a:rPr dirty="0"/>
-              <a:t>Receive frames</a:t>
-            </a:r>
-            <a:r>
-              <a:rPr lang="en-US" dirty="0"/>
-              <a:t> on input ports</a:t>
-            </a:r>
-          </a:p>
-          <a:p>
-            <a:pPr lvl="1"/>
-            <a:r>
-              <a:rPr lang="en-US" dirty="0"/>
-              <a:t>M</a:t>
-            </a:r>
-            <a:r>
-              <a:rPr dirty="0"/>
-              <a:t>ake</a:t>
-            </a:r>
-            <a:r>
-              <a:rPr lang="en-US" dirty="0"/>
-              <a:t> a</a:t>
-            </a:r>
-            <a:r>
-              <a:rPr dirty="0"/>
-              <a:t> forwarding decision</a:t>
+              <a:rPr dirty="0"/>
+              <a:t>Invented at Xerox PARC in 1973</a:t>
             </a:r>
             <a:endParaRPr lang="en-US" dirty="0"/>
           </a:p>
           <a:p>
             <a:pPr lvl="1"/>
             <a:r>
-              <a:rPr lang="en-US" dirty="0"/>
-              <a:t>Transmit frames on output ports</a:t>
-            </a:r>
-          </a:p>
-          <a:p>
-            <a:r>
-              <a:rPr lang="en-US" dirty="0"/>
-              <a:t>Configured (programmed) for varied deployments</a:t>
-            </a:r>
-          </a:p>
-          <a:p>
-            <a:pPr lvl="1"/>
-            <a:r>
-              <a:rPr lang="en-US" dirty="0"/>
-              <a:t>IP packets (L3 Switch, Router)</a:t>
-            </a:r>
-          </a:p>
-          <a:p>
-            <a:pPr lvl="1"/>
-            <a:r>
-              <a:rPr lang="en-US" dirty="0"/>
-              <a:t>Ethernet packets (L2 Switch, Bridge)</a:t>
-            </a:r>
-          </a:p>
-          <a:p>
-            <a:pPr lvl="1"/>
-            <a:r>
-              <a:rPr lang="en-US" dirty="0"/>
-              <a:t>Both (L2/L3 Switch)</a:t>
-            </a:r>
+              <a:rPr dirty="0"/>
+              <a:t>10 Mbps over shared coaxial cable</a:t>
+            </a:r>
+            <a:endParaRPr lang="en-US" dirty="0"/>
+          </a:p>
+          <a:p>
+            <a:pPr lvl="1"/>
+            <a:r>
+              <a:rPr lang="en-US" dirty="0"/>
+              <a:t>Inspired by ALOHA wireless network</a:t>
+            </a:r>
+            <a:endParaRPr dirty="0"/>
+          </a:p>
+          <a:p>
+            <a:r>
+              <a:rPr dirty="0"/>
+              <a:t>CSMA/CD</a:t>
+            </a:r>
+            <a:r>
+              <a:rPr lang="en-US" dirty="0"/>
+              <a:t> – Carrier Sense Multiple Access with Collision Detection</a:t>
+            </a:r>
+          </a:p>
+          <a:p>
+            <a:pPr lvl="1"/>
+            <a:r>
+              <a:rPr lang="en-US" dirty="0"/>
+              <a:t>L</a:t>
+            </a:r>
+            <a:r>
+              <a:rPr dirty="0"/>
+              <a:t>isten </a:t>
+            </a:r>
+            <a:r>
+              <a:rPr lang="en-US" dirty="0"/>
+              <a:t>for idle channel </a:t>
+            </a:r>
+            <a:r>
+              <a:rPr dirty="0"/>
+              <a:t>before transmit</a:t>
+            </a:r>
+            <a:r>
+              <a:rPr lang="en-US" dirty="0"/>
+              <a:t>ting</a:t>
+            </a:r>
+          </a:p>
+          <a:p>
+            <a:pPr lvl="1"/>
+            <a:r>
+              <a:rPr lang="en-US" dirty="0"/>
+              <a:t>B</a:t>
+            </a:r>
+            <a:r>
+              <a:rPr dirty="0"/>
+              <a:t>ackoff exponentially </a:t>
+            </a:r>
+            <a:r>
+              <a:rPr lang="en-US" dirty="0"/>
+              <a:t>if a </a:t>
+            </a:r>
+            <a:r>
+              <a:rPr dirty="0"/>
+              <a:t>collision</a:t>
+            </a:r>
+            <a:r>
+              <a:rPr lang="en-US" dirty="0"/>
+              <a:t> is detected</a:t>
+            </a:r>
+            <a:endParaRPr dirty="0"/>
+          </a:p>
+          <a:p>
+            <a:r>
+              <a:rPr lang="en-US" dirty="0"/>
+              <a:t>Adapted Over Time</a:t>
+            </a:r>
+          </a:p>
+          <a:p>
+            <a:pPr lvl="1"/>
+            <a:r>
+              <a:rPr dirty="0"/>
+              <a:t>10M → 100M → 1G → 10G → 100G → 400G</a:t>
+            </a:r>
+            <a:endParaRPr lang="en-US" dirty="0"/>
+          </a:p>
+          <a:p>
+            <a:pPr lvl="2"/>
+            <a:r>
+              <a:rPr lang="en-US" dirty="0"/>
+              <a:t>Improved encoding</a:t>
+            </a:r>
+          </a:p>
+          <a:p>
+            <a:pPr lvl="2"/>
+            <a:r>
+              <a:rPr lang="en-US" dirty="0"/>
+              <a:t>Improved signaling</a:t>
+            </a:r>
+          </a:p>
+          <a:p>
+            <a:pPr lvl="2"/>
+            <a:r>
+              <a:rPr lang="en-US" dirty="0"/>
+              <a:t>New media (e.g., fiber)</a:t>
+            </a:r>
+          </a:p>
+          <a:p>
+            <a:pPr lvl="1"/>
+            <a:r>
+              <a:rPr lang="en-US" dirty="0"/>
+              <a:t>Multi-Access → Point-to-Point</a:t>
+            </a:r>
+            <a:r>
+              <a:rPr lang="en-US" dirty="0">
+                <a:sym typeface="Wingdings" pitchFamily="2" charset="2"/>
+              </a:rPr>
+              <a:t> (became a switched network)</a:t>
+            </a:r>
+            <a:endParaRPr dirty="0"/>
+          </a:p>
+          <a:p>
+            <a:pPr lvl="1"/>
+            <a:r>
+              <a:rPr lang="en-US" dirty="0"/>
+              <a:t>Always backwards compatible (frame format, 48-bit </a:t>
+            </a:r>
+            <a:r>
+              <a:rPr dirty="0"/>
+              <a:t>address</a:t>
+            </a:r>
+            <a:r>
+              <a:rPr lang="en-US" dirty="0"/>
+              <a:t>es)</a:t>
+            </a:r>
+            <a:endParaRPr dirty="0"/>
           </a:p>
         </p:txBody>
       </p:sp>
@@ -2302,6 +2614,230 @@
 </file>
 
 <file path=ppt/slides/slide11.xml><?xml version="1.0" encoding="utf-8"?>
+<p:sld xmlns:a="http://schemas.openxmlformats.org/drawingml/2006/main" xmlns:r="http://schemas.openxmlformats.org/officeDocument/2006/relationships" xmlns:p="http://schemas.openxmlformats.org/presentationml/2006/main">
+  <p:cSld>
+    <p:spTree>
+      <p:nvGrpSpPr>
+        <p:cNvPr id="1" name=""/>
+        <p:cNvGrpSpPr/>
+        <p:nvPr/>
+      </p:nvGrpSpPr>
+      <p:grpSpPr>
+        <a:xfrm>
+          <a:off x="0" y="0"/>
+          <a:ext cx="0" cy="0"/>
+          <a:chOff x="0" y="0"/>
+          <a:chExt cx="0" cy="0"/>
+        </a:xfrm>
+      </p:grpSpPr>
+      <p:sp>
+        <p:nvSpPr>
+          <p:cNvPr id="2" name="Title 1">
+            <a:extLst>
+              <a:ext uri="{FF2B5EF4-FFF2-40B4-BE49-F238E27FC236}">
+                <a16:creationId xmlns:a16="http://schemas.microsoft.com/office/drawing/2014/main" id="{EE665478-D335-15B2-2C7B-178683FBD76F}"/>
+              </a:ext>
+            </a:extLst>
+          </p:cNvPr>
+          <p:cNvSpPr>
+            <a:spLocks noGrp="1"/>
+          </p:cNvSpPr>
+          <p:nvPr>
+            <p:ph type="ctrTitle"/>
+          </p:nvPr>
+        </p:nvSpPr>
+        <p:spPr/>
+        <p:txBody>
+          <a:bodyPr/>
+          <a:lstStyle/>
+          <a:p>
+            <a:r>
+              <a:rPr lang="en-US" dirty="0"/>
+              <a:t>Switch Technology</a:t>
+            </a:r>
+          </a:p>
+        </p:txBody>
+      </p:sp>
+    </p:spTree>
+    <p:extLst>
+      <p:ext uri="{BB962C8B-B14F-4D97-AF65-F5344CB8AC3E}">
+        <p14:creationId xmlns:p14="http://schemas.microsoft.com/office/powerpoint/2010/main" val="2650919023"/>
+      </p:ext>
+    </p:extLst>
+  </p:cSld>
+  <p:clrMapOvr>
+    <a:masterClrMapping/>
+  </p:clrMapOvr>
+</p:sld>
+</file>
+
+<file path=ppt/slides/slide12.xml><?xml version="1.0" encoding="utf-8"?>
+<p:sld xmlns:a="http://schemas.openxmlformats.org/drawingml/2006/main" xmlns:r="http://schemas.openxmlformats.org/officeDocument/2006/relationships" xmlns:p="http://schemas.openxmlformats.org/presentationml/2006/main">
+  <p:cSld>
+    <p:spTree>
+      <p:nvGrpSpPr>
+        <p:cNvPr id="1" name=""/>
+        <p:cNvGrpSpPr/>
+        <p:nvPr/>
+      </p:nvGrpSpPr>
+      <p:grpSpPr>
+        <a:xfrm>
+          <a:off x="0" y="0"/>
+          <a:ext cx="0" cy="0"/>
+          <a:chOff x="0" y="0"/>
+          <a:chExt cx="0" cy="0"/>
+        </a:xfrm>
+      </p:grpSpPr>
+      <p:sp>
+        <p:nvSpPr>
+          <p:cNvPr id="2" name="Title 1"/>
+          <p:cNvSpPr>
+            <a:spLocks noGrp="1"/>
+          </p:cNvSpPr>
+          <p:nvPr>
+            <p:ph type="title"/>
+          </p:nvPr>
+        </p:nvSpPr>
+        <p:spPr/>
+        <p:txBody>
+          <a:bodyPr/>
+          <a:lstStyle/>
+          <a:p>
+            <a:r>
+              <a:rPr dirty="0"/>
+              <a:t>Packet Switch</a:t>
+            </a:r>
+            <a:r>
+              <a:rPr lang="en-US" dirty="0"/>
+              <a:t>es</a:t>
+            </a:r>
+            <a:endParaRPr dirty="0"/>
+          </a:p>
+        </p:txBody>
+      </p:sp>
+      <p:sp>
+        <p:nvSpPr>
+          <p:cNvPr id="3" name="Content Placeholder 2"/>
+          <p:cNvSpPr>
+            <a:spLocks noGrp="1"/>
+          </p:cNvSpPr>
+          <p:nvPr>
+            <p:ph idx="1"/>
+          </p:nvPr>
+        </p:nvSpPr>
+        <p:spPr>
+          <a:xfrm>
+            <a:off x="838200" y="1548225"/>
+            <a:ext cx="10515600" cy="4952588"/>
+          </a:xfrm>
+        </p:spPr>
+        <p:txBody>
+          <a:bodyPr>
+            <a:normAutofit/>
+          </a:bodyPr>
+          <a:lstStyle/>
+          <a:p>
+            <a:r>
+              <a:rPr lang="en-US" dirty="0"/>
+              <a:t>Building block of the Internet</a:t>
+            </a:r>
+          </a:p>
+          <a:p>
+            <a:pPr lvl="1"/>
+            <a:r>
+              <a:rPr lang="en-US" dirty="0"/>
+              <a:t>Switches are to Networking as Servers are to Computing</a:t>
+            </a:r>
+          </a:p>
+          <a:p>
+            <a:pPr lvl="1"/>
+            <a:r>
+              <a:rPr lang="en-US" dirty="0"/>
+              <a:t>Where functionality described in Part II is implemented</a:t>
+            </a:r>
+          </a:p>
+          <a:p>
+            <a:r>
+              <a:rPr lang="en-US" dirty="0"/>
+              <a:t>Common Platform</a:t>
+            </a:r>
+          </a:p>
+          <a:p>
+            <a:pPr lvl="1"/>
+            <a:r>
+              <a:rPr dirty="0"/>
+              <a:t>Receive frames</a:t>
+            </a:r>
+            <a:r>
+              <a:rPr lang="en-US" dirty="0"/>
+              <a:t> on input ports</a:t>
+            </a:r>
+          </a:p>
+          <a:p>
+            <a:pPr lvl="1"/>
+            <a:r>
+              <a:rPr lang="en-US" dirty="0"/>
+              <a:t>M</a:t>
+            </a:r>
+            <a:r>
+              <a:rPr dirty="0"/>
+              <a:t>ake</a:t>
+            </a:r>
+            <a:r>
+              <a:rPr lang="en-US" dirty="0"/>
+              <a:t> a</a:t>
+            </a:r>
+            <a:r>
+              <a:rPr dirty="0"/>
+              <a:t> forwarding decision</a:t>
+            </a:r>
+            <a:endParaRPr lang="en-US" dirty="0"/>
+          </a:p>
+          <a:p>
+            <a:pPr lvl="1"/>
+            <a:r>
+              <a:rPr lang="en-US" dirty="0"/>
+              <a:t>Transmit frames on output ports</a:t>
+            </a:r>
+          </a:p>
+          <a:p>
+            <a:r>
+              <a:rPr lang="en-US" dirty="0"/>
+              <a:t>Configured (programmed) for varied deployments</a:t>
+            </a:r>
+          </a:p>
+          <a:p>
+            <a:pPr lvl="1"/>
+            <a:r>
+              <a:rPr lang="en-US" dirty="0"/>
+              <a:t>IP packets (L3 Switch, Router)</a:t>
+            </a:r>
+          </a:p>
+          <a:p>
+            <a:pPr lvl="1"/>
+            <a:r>
+              <a:rPr lang="en-US" dirty="0"/>
+              <a:t>Ethernet packets (L2 Switch, Bridge)</a:t>
+            </a:r>
+          </a:p>
+          <a:p>
+            <a:pPr lvl="1"/>
+            <a:r>
+              <a:rPr lang="en-US" dirty="0"/>
+              <a:t>Both (L2/L3 Switch)</a:t>
+            </a:r>
+          </a:p>
+        </p:txBody>
+      </p:sp>
+    </p:spTree>
+  </p:cSld>
+  <p:clrMapOvr>
+    <a:masterClrMapping/>
+  </p:clrMapOvr>
+</p:sld>
+</file>
+
+<file path=ppt/slides/slide13.xml><?xml version="1.0" encoding="utf-8"?>
 <p:sld xmlns:a="http://schemas.openxmlformats.org/drawingml/2006/main" xmlns:r="http://schemas.openxmlformats.org/officeDocument/2006/relationships" xmlns:p="http://schemas.openxmlformats.org/presentationml/2006/main">
   <p:cSld>
     <p:spTree>
@@ -2486,7 +3022,7 @@
 </p:sld>
 </file>
 
-<file path=ppt/slides/slide12.xml><?xml version="1.0" encoding="utf-8"?>
+<file path=ppt/slides/slide14.xml><?xml version="1.0" encoding="utf-8"?>
 <p:sld xmlns:a="http://schemas.openxmlformats.org/drawingml/2006/main" xmlns:r="http://schemas.openxmlformats.org/officeDocument/2006/relationships" xmlns:p="http://schemas.openxmlformats.org/presentationml/2006/main">
   <p:cSld>
     <p:spTree>
@@ -2723,7 +3259,7 @@
 </p:sld>
 </file>
 
-<file path=ppt/slides/slide13.xml><?xml version="1.0" encoding="utf-8"?>
+<file path=ppt/slides/slide15.xml><?xml version="1.0" encoding="utf-8"?>
 <p:sld xmlns:a="http://schemas.openxmlformats.org/drawingml/2006/main" xmlns:r="http://schemas.openxmlformats.org/officeDocument/2006/relationships" xmlns:p="http://schemas.openxmlformats.org/presentationml/2006/main">
   <p:cSld>
     <p:spTree>
@@ -2915,7 +3451,7 @@
 </p:sld>
 </file>
 
-<file path=ppt/slides/slide14.xml><?xml version="1.0" encoding="utf-8"?>
+<file path=ppt/slides/slide16.xml><?xml version="1.0" encoding="utf-8"?>
 <p:sld xmlns:a="http://schemas.openxmlformats.org/drawingml/2006/main" xmlns:r="http://schemas.openxmlformats.org/officeDocument/2006/relationships" xmlns:p="http://schemas.openxmlformats.org/presentationml/2006/main">
   <p:cSld>
     <p:spTree>
@@ -3303,7 +3839,7 @@
 </p:sld>
 </file>
 
-<file path=ppt/slides/slide15.xml><?xml version="1.0" encoding="utf-8"?>
+<file path=ppt/slides/slide17.xml><?xml version="1.0" encoding="utf-8"?>
 <p:sld xmlns:a="http://schemas.openxmlformats.org/drawingml/2006/main" xmlns:r="http://schemas.openxmlformats.org/officeDocument/2006/relationships" xmlns:p="http://schemas.openxmlformats.org/presentationml/2006/main">
   <p:cSld>
     <p:spTree>
@@ -3427,318 +3963,6 @@
 </p:sld>
 </file>
 
-<file path=ppt/slides/slide16.xml><?xml version="1.0" encoding="utf-8"?>
-<p:sld xmlns:a="http://schemas.openxmlformats.org/drawingml/2006/main" xmlns:r="http://schemas.openxmlformats.org/officeDocument/2006/relationships" xmlns:p="http://schemas.openxmlformats.org/presentationml/2006/main">
-  <p:cSld>
-    <p:spTree>
-      <p:nvGrpSpPr>
-        <p:cNvPr id="1" name=""/>
-        <p:cNvGrpSpPr/>
-        <p:nvPr/>
-      </p:nvGrpSpPr>
-      <p:grpSpPr>
-        <a:xfrm>
-          <a:off x="0" y="0"/>
-          <a:ext cx="0" cy="0"/>
-          <a:chOff x="0" y="0"/>
-          <a:chExt cx="0" cy="0"/>
-        </a:xfrm>
-      </p:grpSpPr>
-      <p:sp>
-        <p:nvSpPr>
-          <p:cNvPr id="2" name="Title 1"/>
-          <p:cNvSpPr>
-            <a:spLocks noGrp="1"/>
-          </p:cNvSpPr>
-          <p:nvPr>
-            <p:ph type="title"/>
-          </p:nvPr>
-        </p:nvSpPr>
-        <p:spPr/>
-        <p:txBody>
-          <a:bodyPr/>
-          <a:lstStyle/>
-          <a:p>
-            <a:r>
-              <a:rPr lang="en-US" dirty="0"/>
-              <a:t>Programmable Pipeline</a:t>
-            </a:r>
-            <a:endParaRPr dirty="0"/>
-          </a:p>
-        </p:txBody>
-      </p:sp>
-      <p:sp>
-        <p:nvSpPr>
-          <p:cNvPr id="3" name="Content Placeholder 2"/>
-          <p:cNvSpPr>
-            <a:spLocks noGrp="1"/>
-          </p:cNvSpPr>
-          <p:nvPr>
-            <p:ph idx="1"/>
-          </p:nvPr>
-        </p:nvSpPr>
-        <p:spPr>
-          <a:xfrm>
-            <a:off x="838200" y="1162030"/>
-            <a:ext cx="10328564" cy="5438796"/>
-          </a:xfrm>
-        </p:spPr>
-        <p:txBody>
-          <a:bodyPr>
-            <a:normAutofit/>
-          </a:bodyPr>
-          <a:lstStyle/>
-          <a:p>
-            <a:r>
-              <a:rPr lang="en-US" dirty="0"/>
-              <a:t>OpenFlow uses a </a:t>
-            </a:r>
-            <a:r>
-              <a:rPr lang="en-US" i="1" dirty="0"/>
-              <a:t>Fixed Pipeline</a:t>
-            </a:r>
-          </a:p>
-          <a:p>
-            <a:pPr lvl="1"/>
-            <a:r>
-              <a:rPr lang="en-US" dirty="0"/>
-              <a:t>Each table is hardwired to specific hearer field(s)</a:t>
-            </a:r>
-          </a:p>
-          <a:p>
-            <a:pPr lvl="1"/>
-            <a:r>
-              <a:rPr lang="en-US" dirty="0"/>
-              <a:t>Change requires a change to the standard</a:t>
-            </a:r>
-          </a:p>
-          <a:p>
-            <a:pPr lvl="1"/>
-            <a:r>
-              <a:rPr lang="en-US" dirty="0"/>
-              <a:t>Vendors introduced vendor-specific features</a:t>
-            </a:r>
-          </a:p>
-          <a:p>
-            <a:pPr lvl="1"/>
-            <a:r>
-              <a:rPr lang="en-US" dirty="0"/>
-              <a:t>A programmable alternative is more flexible</a:t>
-            </a:r>
-          </a:p>
-          <a:p>
-            <a:r>
-              <a:rPr lang="en-US" dirty="0"/>
-              <a:t>P4: Programming Protocol-independent Packet Processors</a:t>
-            </a:r>
-          </a:p>
-          <a:p>
-            <a:pPr lvl="1"/>
-            <a:r>
-              <a:rPr lang="en-US" dirty="0"/>
-              <a:t>L</a:t>
-            </a:r>
-            <a:r>
-              <a:rPr dirty="0"/>
-              <a:t>anguage for defining custom packet processing</a:t>
-            </a:r>
-            <a:endParaRPr lang="en-US" dirty="0"/>
-          </a:p>
-          <a:p>
-            <a:pPr lvl="1"/>
-            <a:r>
-              <a:rPr lang="en-US" dirty="0"/>
-              <a:t>Similar to C, but with constructs for matching headers</a:t>
-            </a:r>
-          </a:p>
-          <a:p>
-            <a:r>
-              <a:rPr dirty="0"/>
-              <a:t>PISA</a:t>
-            </a:r>
-            <a:r>
-              <a:rPr lang="en-US" dirty="0"/>
-              <a:t>: Protocol-independent Switch Architecture</a:t>
-            </a:r>
-          </a:p>
-          <a:p>
-            <a:pPr lvl="1"/>
-            <a:r>
-              <a:rPr lang="en-US" dirty="0"/>
-              <a:t>Forwarding pipeline with programmable stages/tables</a:t>
-            </a:r>
-          </a:p>
-          <a:p>
-            <a:pPr lvl="1"/>
-            <a:r>
-              <a:rPr lang="en-US" dirty="0"/>
-              <a:t>Serves as the target “instruction set” for P4 compiler</a:t>
-            </a:r>
-          </a:p>
-          <a:p>
-            <a:r>
-              <a:rPr lang="en-US" dirty="0"/>
-              <a:t>Toolchain for generating Control/Data Plane API from P4 programs</a:t>
-            </a:r>
-            <a:endParaRPr dirty="0"/>
-          </a:p>
-        </p:txBody>
-      </p:sp>
-    </p:spTree>
-  </p:cSld>
-  <p:clrMapOvr>
-    <a:masterClrMapping/>
-  </p:clrMapOvr>
-</p:sld>
-</file>
-
-<file path=ppt/slides/slide17.xml><?xml version="1.0" encoding="utf-8"?>
-<p:sld xmlns:a="http://schemas.openxmlformats.org/drawingml/2006/main" xmlns:r="http://schemas.openxmlformats.org/officeDocument/2006/relationships" xmlns:p="http://schemas.openxmlformats.org/presentationml/2006/main">
-  <p:cSld>
-    <p:spTree>
-      <p:nvGrpSpPr>
-        <p:cNvPr id="1" name=""/>
-        <p:cNvGrpSpPr/>
-        <p:nvPr/>
-      </p:nvGrpSpPr>
-      <p:grpSpPr>
-        <a:xfrm>
-          <a:off x="0" y="0"/>
-          <a:ext cx="0" cy="0"/>
-          <a:chOff x="0" y="0"/>
-          <a:chExt cx="0" cy="0"/>
-        </a:xfrm>
-      </p:grpSpPr>
-      <p:sp>
-        <p:nvSpPr>
-          <p:cNvPr id="2" name="Title 1"/>
-          <p:cNvSpPr>
-            <a:spLocks noGrp="1"/>
-          </p:cNvSpPr>
-          <p:nvPr>
-            <p:ph type="title"/>
-          </p:nvPr>
-        </p:nvSpPr>
-        <p:spPr/>
-        <p:txBody>
-          <a:bodyPr/>
-          <a:lstStyle/>
-          <a:p>
-            <a:r>
-              <a:rPr dirty="0"/>
-              <a:t>Switch OS</a:t>
-            </a:r>
-          </a:p>
-        </p:txBody>
-      </p:sp>
-      <p:sp>
-        <p:nvSpPr>
-          <p:cNvPr id="3" name="Content Placeholder 2"/>
-          <p:cNvSpPr>
-            <a:spLocks noGrp="1"/>
-          </p:cNvSpPr>
-          <p:nvPr>
-            <p:ph idx="1"/>
-          </p:nvPr>
-        </p:nvSpPr>
-        <p:spPr>
-          <a:xfrm>
-            <a:off x="838080" y="1476359"/>
-            <a:ext cx="5340222" cy="4567253"/>
-          </a:xfrm>
-        </p:spPr>
-        <p:txBody>
-          <a:bodyPr>
-            <a:normAutofit/>
-          </a:bodyPr>
-          <a:lstStyle/>
-          <a:p>
-            <a:r>
-              <a:rPr lang="en-US" dirty="0"/>
-              <a:t>Switch OS runs on switch CPU</a:t>
-            </a:r>
-          </a:p>
-          <a:p>
-            <a:pPr lvl="1"/>
-            <a:r>
-              <a:rPr lang="en-US" dirty="0"/>
-              <a:t>SONIC: open Linux-based option</a:t>
-            </a:r>
-            <a:endParaRPr dirty="0"/>
-          </a:p>
-          <a:p>
-            <a:r>
-              <a:rPr lang="en-US" dirty="0"/>
-              <a:t>Switch OS hosts the Control Plane</a:t>
-            </a:r>
-          </a:p>
-          <a:p>
-            <a:pPr lvl="1"/>
-            <a:r>
-              <a:rPr lang="en-US" dirty="0"/>
-              <a:t>Offers </a:t>
-            </a:r>
-            <a:r>
-              <a:rPr dirty="0"/>
-              <a:t>Northbound Interface</a:t>
-            </a:r>
-            <a:r>
-              <a:rPr lang="en-US" dirty="0"/>
-              <a:t> (NBI</a:t>
-            </a:r>
-            <a:r>
-              <a:rPr dirty="0"/>
-              <a:t>)</a:t>
-            </a:r>
-          </a:p>
-          <a:p>
-            <a:r>
-              <a:rPr lang="en-US" dirty="0"/>
-              <a:t>Off-Switch Management Plane</a:t>
-            </a:r>
-          </a:p>
-          <a:p>
-            <a:pPr lvl="1"/>
-            <a:r>
-              <a:rPr lang="en-US" dirty="0"/>
-              <a:t>Uses NBI to manage switch</a:t>
-            </a:r>
-            <a:endParaRPr dirty="0"/>
-          </a:p>
-        </p:txBody>
-      </p:sp>
-      <p:pic>
-        <p:nvPicPr>
-          <p:cNvPr id="4" name="Picture 3" descr="nbi.png"/>
-          <p:cNvPicPr>
-            <a:picLocks noChangeAspect="1"/>
-          </p:cNvPicPr>
-          <p:nvPr/>
-        </p:nvPicPr>
-        <p:blipFill>
-          <a:blip r:embed="rId2"/>
-          <a:stretch>
-            <a:fillRect/>
-          </a:stretch>
-        </p:blipFill>
-        <p:spPr>
-          <a:xfrm>
-            <a:off x="6178302" y="1476360"/>
-            <a:ext cx="5169275" cy="4351320"/>
-          </a:xfrm>
-          <a:prstGeom prst="rect">
-            <a:avLst/>
-          </a:prstGeom>
-        </p:spPr>
-      </p:pic>
-    </p:spTree>
-  </p:cSld>
-  <p:clrMapOvr>
-    <a:masterClrMapping/>
-  </p:clrMapOvr>
-</p:sld>
-</file>
-
 <file path=ppt/slides/slide18.xml><?xml version="1.0" encoding="utf-8"?>
 <p:sld xmlns:a="http://schemas.openxmlformats.org/drawingml/2006/main" xmlns:r="http://schemas.openxmlformats.org/officeDocument/2006/relationships" xmlns:p="http://schemas.openxmlformats.org/presentationml/2006/main">
   <p:cSld>
@@ -3772,12 +3996,8 @@
           <a:lstStyle/>
           <a:p>
             <a:r>
-              <a:rPr dirty="0"/>
-              <a:t>Circuit</a:t>
-            </a:r>
-            <a:r>
-              <a:rPr lang="en-US" dirty="0"/>
-              <a:t> Switching</a:t>
+              <a:rPr lang="en-US" dirty="0"/>
+              <a:t>Programmable Pipeline</a:t>
             </a:r>
             <a:endParaRPr dirty="0"/>
           </a:p>
@@ -3795,8 +4015,8 @@
         </p:nvSpPr>
         <p:spPr>
           <a:xfrm>
-            <a:off x="838200" y="1548224"/>
-            <a:ext cx="10515600" cy="4452525"/>
+            <a:off x="838200" y="1162030"/>
+            <a:ext cx="10328564" cy="5438796"/>
           </a:xfrm>
         </p:spPr>
         <p:txBody>
@@ -3807,39 +4027,56 @@
           <a:p>
             <a:r>
               <a:rPr lang="en-US" dirty="0"/>
-              <a:t>Focused on Packet Switching up to this point</a:t>
-            </a:r>
-          </a:p>
-          <a:p>
-            <a:pPr lvl="1"/>
-            <a:r>
-              <a:rPr lang="en-US" dirty="0"/>
-              <a:t>Built around statistical multiplexing</a:t>
-            </a:r>
-          </a:p>
-          <a:p>
-            <a:pPr lvl="1"/>
-            <a:r>
-              <a:rPr lang="en-US" dirty="0"/>
-              <a:t>Adopts Store-and-Forward model</a:t>
-            </a:r>
-          </a:p>
-          <a:p>
-            <a:r>
-              <a:rPr lang="en-US" dirty="0"/>
-              <a:t>Alternative is </a:t>
-            </a:r>
-            <a:r>
-              <a:rPr dirty="0"/>
-              <a:t>Circuit </a:t>
-            </a:r>
-            <a:r>
-              <a:rPr lang="en-US" dirty="0"/>
-              <a:t>S</a:t>
-            </a:r>
-            <a:r>
-              <a:rPr dirty="0"/>
-              <a:t>witching</a:t>
+              <a:t>OpenFlow uses a </a:t>
+            </a:r>
+            <a:r>
+              <a:rPr lang="en-US" i="1" dirty="0"/>
+              <a:t>Fixed Pipeline</a:t>
+            </a:r>
+          </a:p>
+          <a:p>
+            <a:pPr lvl="1"/>
+            <a:r>
+              <a:rPr lang="en-US" dirty="0"/>
+              <a:t>Each table is hardwired to specific hearer field(s)</a:t>
+            </a:r>
+          </a:p>
+          <a:p>
+            <a:pPr lvl="1"/>
+            <a:r>
+              <a:rPr lang="en-US" dirty="0"/>
+              <a:t>Change requires a change to the standard</a:t>
+            </a:r>
+          </a:p>
+          <a:p>
+            <a:pPr lvl="1"/>
+            <a:r>
+              <a:rPr lang="en-US" dirty="0"/>
+              <a:t>Vendors introduced vendor-specific features</a:t>
+            </a:r>
+          </a:p>
+          <a:p>
+            <a:pPr lvl="1"/>
+            <a:r>
+              <a:rPr lang="en-US" dirty="0"/>
+              <a:t>A programmable alternative is more flexible</a:t>
+            </a:r>
+          </a:p>
+          <a:p>
+            <a:r>
+              <a:rPr lang="en-US" dirty="0"/>
+              <a:t>P4: Programming Protocol-independent Packet Processors</a:t>
+            </a:r>
+          </a:p>
+          <a:p>
+            <a:pPr lvl="1"/>
+            <a:r>
+              <a:rPr lang="en-US" dirty="0"/>
+              <a:t>L</a:t>
+            </a:r>
+            <a:r>
+              <a:rPr dirty="0"/>
+              <a:t>anguage for defining custom packet processing</a:t>
             </a:r>
             <a:endParaRPr lang="en-US" dirty="0"/>
           </a:p>
@@ -3847,49 +4084,37 @@
             <a:pPr lvl="1"/>
             <a:r>
               <a:rPr lang="en-US" dirty="0"/>
-              <a:t>Set up end-to-end path before using</a:t>
-            </a:r>
-          </a:p>
-          <a:p>
-            <a:pPr lvl="1"/>
-            <a:r>
-              <a:rPr lang="en-US" dirty="0"/>
-              <a:t>R</a:t>
-            </a:r>
-            <a:r>
-              <a:rPr dirty="0"/>
-              <a:t>eserve </a:t>
-            </a:r>
-            <a:r>
-              <a:rPr lang="en-US" dirty="0"/>
-              <a:t>link bandwidth and switching capacity along circuit</a:t>
-            </a:r>
-          </a:p>
-          <a:p>
-            <a:pPr lvl="1"/>
-            <a:r>
-              <a:rPr lang="en-US" dirty="0"/>
-              <a:t>Bits (or signals) flow through switch without buffering</a:t>
-            </a:r>
-          </a:p>
-          <a:p>
-            <a:r>
-              <a:rPr lang="en-US" dirty="0"/>
-              <a:t>Two Examples</a:t>
-            </a:r>
-          </a:p>
-          <a:p>
-            <a:pPr lvl="1"/>
-            <a:r>
-              <a:rPr lang="en-US" dirty="0"/>
-              <a:t>Modern: All-optical networks using Wave Division Multiplexing</a:t>
-            </a:r>
-          </a:p>
-          <a:p>
-            <a:pPr lvl="1"/>
-            <a:r>
-              <a:rPr lang="en-US" dirty="0"/>
-              <a:t>Legacy: Electrical switches (optical fiber) using Time Division Multiplexing</a:t>
+              <a:t>Similar to C, but with constructs for matching headers</a:t>
+            </a:r>
+          </a:p>
+          <a:p>
+            <a:r>
+              <a:rPr dirty="0"/>
+              <a:t>PISA</a:t>
+            </a:r>
+            <a:r>
+              <a:rPr lang="en-US" dirty="0"/>
+              <a:t>: Protocol-independent Switch Architecture</a:t>
+            </a:r>
+          </a:p>
+          <a:p>
+            <a:pPr lvl="1"/>
+            <a:r>
+              <a:rPr lang="en-US" dirty="0"/>
+              <a:t>Forwarding pipeline with programmable stages/tables</a:t>
+            </a:r>
+          </a:p>
+          <a:p>
+            <a:pPr lvl="1"/>
+            <a:r>
+              <a:rPr lang="en-US" dirty="0"/>
+              <a:t>Serves as the target “instruction set” for P4 compiler</a:t>
+            </a:r>
+          </a:p>
+          <a:p>
+            <a:r>
+              <a:rPr lang="en-US" dirty="0"/>
+              <a:t>Toolchain for generating Control/Data Plane API from P4 programs</a:t>
             </a:r>
             <a:endParaRPr dirty="0"/>
           </a:p>
@@ -3937,7 +4162,7 @@
           <a:p>
             <a:r>
               <a:rPr dirty="0"/>
-              <a:t>All-Optical Networks</a:t>
+              <a:t>Switch OS</a:t>
             </a:r>
           </a:p>
         </p:txBody>
@@ -3954,8 +4179,8 @@
         </p:nvSpPr>
         <p:spPr>
           <a:xfrm>
-            <a:off x="838080" y="1476360"/>
-            <a:ext cx="5181480" cy="4351320"/>
+            <a:off x="838080" y="1476359"/>
+            <a:ext cx="5340222" cy="4567253"/>
           </a:xfrm>
         </p:spPr>
         <p:txBody>
@@ -3965,80 +4190,54 @@
           <a:lstStyle/>
           <a:p>
             <a:r>
-              <a:rPr dirty="0"/>
-              <a:t>D</a:t>
-            </a:r>
-            <a:r>
-              <a:rPr lang="en-US" dirty="0"/>
-              <a:t>WDM</a:t>
-            </a:r>
-          </a:p>
-          <a:p>
-            <a:pPr lvl="1"/>
-            <a:r>
-              <a:rPr lang="en-US" dirty="0"/>
-              <a:t>M</a:t>
-            </a:r>
-            <a:r>
-              <a:rPr dirty="0"/>
-              <a:t>ultiple </a:t>
-            </a:r>
-            <a:r>
-              <a:rPr lang="en-US" dirty="0"/>
-              <a:t>"</a:t>
-            </a:r>
-            <a:r>
-              <a:rPr dirty="0"/>
-              <a:t>colors</a:t>
-            </a:r>
-            <a:r>
-              <a:rPr lang="en-US" dirty="0"/>
-              <a:t>"</a:t>
-            </a:r>
-            <a:r>
-              <a:rPr dirty="0"/>
-              <a:t> share one fiber</a:t>
-            </a:r>
-          </a:p>
-          <a:p>
-            <a:pPr lvl="1"/>
-            <a:r>
-              <a:rPr dirty="0"/>
-              <a:t>80+ channels at 100 Gbps each</a:t>
-            </a:r>
-            <a:endParaRPr lang="en-US" dirty="0"/>
-          </a:p>
-          <a:p>
-            <a:r>
-              <a:rPr dirty="0"/>
-              <a:t>ROADM</a:t>
-            </a:r>
-            <a:endParaRPr lang="en-US" dirty="0"/>
-          </a:p>
-          <a:p>
-            <a:pPr lvl="1"/>
-            <a:r>
-              <a:rPr lang="en-US" dirty="0"/>
-              <a:t>I</a:t>
-            </a:r>
-            <a:r>
-              <a:rPr dirty="0"/>
-              <a:t>ndividual wavelengths </a:t>
-            </a:r>
-            <a:r>
-              <a:rPr lang="en-US" dirty="0"/>
-              <a:t>routed end-to-end without </a:t>
-            </a:r>
-            <a:r>
-              <a:rPr dirty="0"/>
-              <a:t>converting to electrical signals</a:t>
-            </a:r>
-          </a:p>
-          <a:p>
-            <a:pPr lvl="1"/>
-            <a:r>
-              <a:rPr lang="en-US" dirty="0"/>
-              <a:t>Packet switches at either end of an all-optical circuit</a:t>
+              <a:rPr lang="en-US" dirty="0"/>
+              <a:t>Switch OS runs on switch CPU</a:t>
+            </a:r>
+          </a:p>
+          <a:p>
+            <a:pPr lvl="1"/>
+            <a:r>
+              <a:rPr lang="en-US" dirty="0"/>
+              <a:t>SONIC: open Linux-based option</a:t>
+            </a:r>
+            <a:endParaRPr dirty="0"/>
+          </a:p>
+          <a:p>
+            <a:r>
+              <a:rPr lang="en-US" dirty="0"/>
+              <a:t>Switch OS hosts the Control Plane</a:t>
+            </a:r>
+          </a:p>
+          <a:p>
+            <a:pPr lvl="1"/>
+            <a:r>
+              <a:rPr lang="en-US" dirty="0"/>
+              <a:t>Offers </a:t>
+            </a:r>
+            <a:r>
+              <a:rPr dirty="0"/>
+              <a:t>Northbound Interface</a:t>
+            </a:r>
+            <a:r>
+              <a:rPr lang="en-US" dirty="0"/>
+              <a:t> (NBI</a:t>
+            </a:r>
+            <a:r>
+              <a:rPr dirty="0"/>
+              <a:t>)</a:t>
+            </a:r>
+          </a:p>
+          <a:p>
+            <a:r>
+              <a:rPr lang="en-US" dirty="0"/>
+              <a:t>Off-Switch Management Plane</a:t>
+            </a:r>
+          </a:p>
+          <a:p>
+            <a:pPr lvl="1"/>
+            <a:r>
+              <a:rPr lang="en-US" dirty="0"/>
+              <a:t>Uses NBI to manage switch</a:t>
             </a:r>
             <a:endParaRPr dirty="0"/>
           </a:p>
@@ -4046,7 +4245,7 @@
       </p:sp>
       <p:pic>
         <p:nvPicPr>
-          <p:cNvPr id="4" name="Picture 3" descr="roadm.png"/>
+          <p:cNvPr id="4" name="Picture 3" descr="nbi.png"/>
           <p:cNvPicPr>
             <a:picLocks noChangeAspect="1"/>
           </p:cNvPicPr>
@@ -4060,8 +4259,8 @@
         </p:blipFill>
         <p:spPr>
           <a:xfrm>
-            <a:off x="6172199" y="2643189"/>
-            <a:ext cx="5471027" cy="1916248"/>
+            <a:off x="6178302" y="1476360"/>
+            <a:ext cx="5169275" cy="4351320"/>
           </a:xfrm>
           <a:prstGeom prst="rect">
             <a:avLst/>
@@ -4407,6 +4606,397 @@
       </p:grpSpPr>
       <p:sp>
         <p:nvSpPr>
+          <p:cNvPr id="2" name="Title 1">
+            <a:extLst>
+              <a:ext uri="{FF2B5EF4-FFF2-40B4-BE49-F238E27FC236}">
+                <a16:creationId xmlns:a16="http://schemas.microsoft.com/office/drawing/2014/main" id="{28F8D146-E3F9-BA94-1851-B0C0933709B8}"/>
+              </a:ext>
+            </a:extLst>
+          </p:cNvPr>
+          <p:cNvSpPr>
+            <a:spLocks noGrp="1"/>
+          </p:cNvSpPr>
+          <p:nvPr>
+            <p:ph type="ctrTitle"/>
+          </p:nvPr>
+        </p:nvSpPr>
+        <p:spPr/>
+        <p:txBody>
+          <a:bodyPr/>
+          <a:lstStyle/>
+          <a:p>
+            <a:r>
+              <a:rPr lang="en-US" dirty="0"/>
+              <a:t>Circuit Switching</a:t>
+            </a:r>
+          </a:p>
+        </p:txBody>
+      </p:sp>
+    </p:spTree>
+    <p:extLst>
+      <p:ext uri="{BB962C8B-B14F-4D97-AF65-F5344CB8AC3E}">
+        <p14:creationId xmlns:p14="http://schemas.microsoft.com/office/powerpoint/2010/main" val="3839490336"/>
+      </p:ext>
+    </p:extLst>
+  </p:cSld>
+  <p:clrMapOvr>
+    <a:masterClrMapping/>
+  </p:clrMapOvr>
+</p:sld>
+</file>
+
+<file path=ppt/slides/slide21.xml><?xml version="1.0" encoding="utf-8"?>
+<p:sld xmlns:a="http://schemas.openxmlformats.org/drawingml/2006/main" xmlns:r="http://schemas.openxmlformats.org/officeDocument/2006/relationships" xmlns:p="http://schemas.openxmlformats.org/presentationml/2006/main">
+  <p:cSld>
+    <p:spTree>
+      <p:nvGrpSpPr>
+        <p:cNvPr id="1" name=""/>
+        <p:cNvGrpSpPr/>
+        <p:nvPr/>
+      </p:nvGrpSpPr>
+      <p:grpSpPr>
+        <a:xfrm>
+          <a:off x="0" y="0"/>
+          <a:ext cx="0" cy="0"/>
+          <a:chOff x="0" y="0"/>
+          <a:chExt cx="0" cy="0"/>
+        </a:xfrm>
+      </p:grpSpPr>
+      <p:sp>
+        <p:nvSpPr>
+          <p:cNvPr id="2" name="Title 1"/>
+          <p:cNvSpPr>
+            <a:spLocks noGrp="1"/>
+          </p:cNvSpPr>
+          <p:nvPr>
+            <p:ph type="title"/>
+          </p:nvPr>
+        </p:nvSpPr>
+        <p:spPr/>
+        <p:txBody>
+          <a:bodyPr/>
+          <a:lstStyle/>
+          <a:p>
+            <a:r>
+              <a:rPr lang="en-US" dirty="0"/>
+              <a:t>Overview</a:t>
+            </a:r>
+            <a:endParaRPr dirty="0"/>
+          </a:p>
+        </p:txBody>
+      </p:sp>
+      <p:sp>
+        <p:nvSpPr>
+          <p:cNvPr id="3" name="Content Placeholder 2"/>
+          <p:cNvSpPr>
+            <a:spLocks noGrp="1"/>
+          </p:cNvSpPr>
+          <p:nvPr>
+            <p:ph idx="1"/>
+          </p:nvPr>
+        </p:nvSpPr>
+        <p:spPr>
+          <a:xfrm>
+            <a:off x="838200" y="1548224"/>
+            <a:ext cx="10515600" cy="4452525"/>
+          </a:xfrm>
+        </p:spPr>
+        <p:txBody>
+          <a:bodyPr>
+            <a:normAutofit/>
+          </a:bodyPr>
+          <a:lstStyle/>
+          <a:p>
+            <a:r>
+              <a:rPr lang="en-US" dirty="0"/>
+              <a:t>Focused on Packet Switching up to this point</a:t>
+            </a:r>
+          </a:p>
+          <a:p>
+            <a:pPr lvl="1"/>
+            <a:r>
+              <a:rPr lang="en-US" dirty="0"/>
+              <a:t>Built around statistical multiplexing</a:t>
+            </a:r>
+          </a:p>
+          <a:p>
+            <a:pPr lvl="1"/>
+            <a:r>
+              <a:rPr lang="en-US" dirty="0"/>
+              <a:t>Adopts Store-and-Forward model</a:t>
+            </a:r>
+          </a:p>
+          <a:p>
+            <a:r>
+              <a:rPr lang="en-US" dirty="0"/>
+              <a:t>Alternative is </a:t>
+            </a:r>
+            <a:r>
+              <a:rPr dirty="0"/>
+              <a:t>Circuit </a:t>
+            </a:r>
+            <a:r>
+              <a:rPr lang="en-US" dirty="0"/>
+              <a:t>S</a:t>
+            </a:r>
+            <a:r>
+              <a:rPr dirty="0"/>
+              <a:t>witching</a:t>
+            </a:r>
+            <a:endParaRPr lang="en-US" dirty="0"/>
+          </a:p>
+          <a:p>
+            <a:pPr lvl="1"/>
+            <a:r>
+              <a:rPr lang="en-US" dirty="0"/>
+              <a:t>Set up end-to-end path before using</a:t>
+            </a:r>
+          </a:p>
+          <a:p>
+            <a:pPr lvl="1"/>
+            <a:r>
+              <a:rPr lang="en-US" dirty="0"/>
+              <a:t>R</a:t>
+            </a:r>
+            <a:r>
+              <a:rPr dirty="0"/>
+              <a:t>eserve </a:t>
+            </a:r>
+            <a:r>
+              <a:rPr lang="en-US" dirty="0"/>
+              <a:t>link bandwidth and switching capacity along circuit</a:t>
+            </a:r>
+          </a:p>
+          <a:p>
+            <a:pPr lvl="1"/>
+            <a:r>
+              <a:rPr lang="en-US" dirty="0"/>
+              <a:t>Bits (or signals) flow through switch without buffering</a:t>
+            </a:r>
+          </a:p>
+          <a:p>
+            <a:r>
+              <a:rPr lang="en-US" dirty="0"/>
+              <a:t>Two Examples</a:t>
+            </a:r>
+          </a:p>
+          <a:p>
+            <a:pPr lvl="1"/>
+            <a:r>
+              <a:rPr lang="en-US" dirty="0"/>
+              <a:t>Modern: All-optical networks using Wave Division Multiplexing</a:t>
+            </a:r>
+          </a:p>
+          <a:p>
+            <a:pPr lvl="1"/>
+            <a:r>
+              <a:rPr lang="en-US" dirty="0"/>
+              <a:t>Legacy: Electrical switches (optical fiber) using Time Division Multiplexing</a:t>
+            </a:r>
+            <a:endParaRPr dirty="0"/>
+          </a:p>
+        </p:txBody>
+      </p:sp>
+    </p:spTree>
+  </p:cSld>
+  <p:clrMapOvr>
+    <a:masterClrMapping/>
+  </p:clrMapOvr>
+</p:sld>
+</file>
+
+<file path=ppt/slides/slide22.xml><?xml version="1.0" encoding="utf-8"?>
+<p:sld xmlns:a="http://schemas.openxmlformats.org/drawingml/2006/main" xmlns:r="http://schemas.openxmlformats.org/officeDocument/2006/relationships" xmlns:p="http://schemas.openxmlformats.org/presentationml/2006/main">
+  <p:cSld>
+    <p:spTree>
+      <p:nvGrpSpPr>
+        <p:cNvPr id="1" name=""/>
+        <p:cNvGrpSpPr/>
+        <p:nvPr/>
+      </p:nvGrpSpPr>
+      <p:grpSpPr>
+        <a:xfrm>
+          <a:off x="0" y="0"/>
+          <a:ext cx="0" cy="0"/>
+          <a:chOff x="0" y="0"/>
+          <a:chExt cx="0" cy="0"/>
+        </a:xfrm>
+      </p:grpSpPr>
+      <p:sp>
+        <p:nvSpPr>
+          <p:cNvPr id="2" name="Title 1"/>
+          <p:cNvSpPr>
+            <a:spLocks noGrp="1"/>
+          </p:cNvSpPr>
+          <p:nvPr>
+            <p:ph type="title"/>
+          </p:nvPr>
+        </p:nvSpPr>
+        <p:spPr/>
+        <p:txBody>
+          <a:bodyPr/>
+          <a:lstStyle/>
+          <a:p>
+            <a:r>
+              <a:rPr dirty="0"/>
+              <a:t>All-Optical Networks</a:t>
+            </a:r>
+          </a:p>
+        </p:txBody>
+      </p:sp>
+      <p:sp>
+        <p:nvSpPr>
+          <p:cNvPr id="3" name="Content Placeholder 2"/>
+          <p:cNvSpPr>
+            <a:spLocks noGrp="1"/>
+          </p:cNvSpPr>
+          <p:nvPr>
+            <p:ph idx="1"/>
+          </p:nvPr>
+        </p:nvSpPr>
+        <p:spPr>
+          <a:xfrm>
+            <a:off x="838080" y="1476360"/>
+            <a:ext cx="5181480" cy="4351320"/>
+          </a:xfrm>
+        </p:spPr>
+        <p:txBody>
+          <a:bodyPr>
+            <a:normAutofit/>
+          </a:bodyPr>
+          <a:lstStyle/>
+          <a:p>
+            <a:r>
+              <a:rPr dirty="0"/>
+              <a:t>D</a:t>
+            </a:r>
+            <a:r>
+              <a:rPr lang="en-US" dirty="0"/>
+              <a:t>WDM</a:t>
+            </a:r>
+          </a:p>
+          <a:p>
+            <a:pPr lvl="1"/>
+            <a:r>
+              <a:rPr lang="en-US" dirty="0"/>
+              <a:t>M</a:t>
+            </a:r>
+            <a:r>
+              <a:rPr dirty="0"/>
+              <a:t>ultiple </a:t>
+            </a:r>
+            <a:r>
+              <a:rPr lang="en-US" dirty="0"/>
+              <a:t>"</a:t>
+            </a:r>
+            <a:r>
+              <a:rPr dirty="0"/>
+              <a:t>colors</a:t>
+            </a:r>
+            <a:r>
+              <a:rPr lang="en-US" dirty="0"/>
+              <a:t>"</a:t>
+            </a:r>
+            <a:r>
+              <a:rPr dirty="0"/>
+              <a:t> share one fiber</a:t>
+            </a:r>
+          </a:p>
+          <a:p>
+            <a:pPr lvl="1"/>
+            <a:r>
+              <a:rPr dirty="0"/>
+              <a:t>80+ channels at 100 Gbps each</a:t>
+            </a:r>
+            <a:endParaRPr lang="en-US" dirty="0"/>
+          </a:p>
+          <a:p>
+            <a:r>
+              <a:rPr dirty="0"/>
+              <a:t>ROADM</a:t>
+            </a:r>
+            <a:endParaRPr lang="en-US" dirty="0"/>
+          </a:p>
+          <a:p>
+            <a:pPr lvl="1"/>
+            <a:r>
+              <a:rPr lang="en-US" dirty="0"/>
+              <a:t>I</a:t>
+            </a:r>
+            <a:r>
+              <a:rPr dirty="0"/>
+              <a:t>ndividual wavelengths </a:t>
+            </a:r>
+            <a:r>
+              <a:rPr lang="en-US" dirty="0"/>
+              <a:t>routed end-to-end without </a:t>
+            </a:r>
+            <a:r>
+              <a:rPr dirty="0"/>
+              <a:t>converting to electrical signals</a:t>
+            </a:r>
+          </a:p>
+          <a:p>
+            <a:pPr lvl="1"/>
+            <a:r>
+              <a:rPr lang="en-US" dirty="0"/>
+              <a:t>Packet switches at either end of an all-optical circuit</a:t>
+            </a:r>
+            <a:endParaRPr dirty="0"/>
+          </a:p>
+        </p:txBody>
+      </p:sp>
+      <p:pic>
+        <p:nvPicPr>
+          <p:cNvPr id="4" name="Picture 3" descr="roadm.png"/>
+          <p:cNvPicPr>
+            <a:picLocks noChangeAspect="1"/>
+          </p:cNvPicPr>
+          <p:nvPr/>
+        </p:nvPicPr>
+        <p:blipFill>
+          <a:blip r:embed="rId2"/>
+          <a:stretch>
+            <a:fillRect/>
+          </a:stretch>
+        </p:blipFill>
+        <p:spPr>
+          <a:xfrm>
+            <a:off x="6172199" y="2643189"/>
+            <a:ext cx="5471027" cy="1916248"/>
+          </a:xfrm>
+          <a:prstGeom prst="rect">
+            <a:avLst/>
+          </a:prstGeom>
+        </p:spPr>
+      </p:pic>
+    </p:spTree>
+  </p:cSld>
+  <p:clrMapOvr>
+    <a:masterClrMapping/>
+  </p:clrMapOvr>
+</p:sld>
+</file>
+
+<file path=ppt/slides/slide23.xml><?xml version="1.0" encoding="utf-8"?>
+<p:sld xmlns:a="http://schemas.openxmlformats.org/drawingml/2006/main" xmlns:r="http://schemas.openxmlformats.org/officeDocument/2006/relationships" xmlns:p="http://schemas.openxmlformats.org/presentationml/2006/main">
+  <p:cSld>
+    <p:spTree>
+      <p:nvGrpSpPr>
+        <p:cNvPr id="1" name=""/>
+        <p:cNvGrpSpPr/>
+        <p:nvPr/>
+      </p:nvGrpSpPr>
+      <p:grpSpPr>
+        <a:xfrm>
+          <a:off x="0" y="0"/>
+          <a:ext cx="0" cy="0"/>
+          <a:chOff x="0" y="0"/>
+          <a:chExt cx="0" cy="0"/>
+        </a:xfrm>
+      </p:grpSpPr>
+      <p:sp>
+        <p:nvSpPr>
           <p:cNvPr id="2" name="Title 1"/>
           <p:cNvSpPr>
             <a:spLocks noGrp="1"/>
@@ -4674,6 +5264,64 @@
       </p:grpSpPr>
       <p:sp>
         <p:nvSpPr>
+          <p:cNvPr id="2" name="Title 1">
+            <a:extLst>
+              <a:ext uri="{FF2B5EF4-FFF2-40B4-BE49-F238E27FC236}">
+                <a16:creationId xmlns:a16="http://schemas.microsoft.com/office/drawing/2014/main" id="{46030088-ACDB-C34C-44C9-C8F0B2EEAD91}"/>
+              </a:ext>
+            </a:extLst>
+          </p:cNvPr>
+          <p:cNvSpPr>
+            <a:spLocks noGrp="1"/>
+          </p:cNvSpPr>
+          <p:nvPr>
+            <p:ph type="ctrTitle"/>
+          </p:nvPr>
+        </p:nvSpPr>
+        <p:spPr/>
+        <p:txBody>
+          <a:bodyPr/>
+          <a:lstStyle/>
+          <a:p>
+            <a:r>
+              <a:rPr lang="en-US" dirty="0"/>
+              <a:t>Link Technology</a:t>
+            </a:r>
+          </a:p>
+        </p:txBody>
+      </p:sp>
+    </p:spTree>
+    <p:extLst>
+      <p:ext uri="{BB962C8B-B14F-4D97-AF65-F5344CB8AC3E}">
+        <p14:creationId xmlns:p14="http://schemas.microsoft.com/office/powerpoint/2010/main" val="3400199031"/>
+      </p:ext>
+    </p:extLst>
+  </p:cSld>
+  <p:clrMapOvr>
+    <a:masterClrMapping/>
+  </p:clrMapOvr>
+</p:sld>
+</file>
+
+<file path=ppt/slides/slide5.xml><?xml version="1.0" encoding="utf-8"?>
+<p:sld xmlns:a="http://schemas.openxmlformats.org/drawingml/2006/main" xmlns:r="http://schemas.openxmlformats.org/officeDocument/2006/relationships" xmlns:p="http://schemas.openxmlformats.org/presentationml/2006/main">
+  <p:cSld>
+    <p:spTree>
+      <p:nvGrpSpPr>
+        <p:cNvPr id="1" name=""/>
+        <p:cNvGrpSpPr/>
+        <p:nvPr/>
+      </p:nvGrpSpPr>
+      <p:grpSpPr>
+        <a:xfrm>
+          <a:off x="0" y="0"/>
+          <a:ext cx="0" cy="0"/>
+          <a:chOff x="0" y="0"/>
+          <a:chExt cx="0" cy="0"/>
+        </a:xfrm>
+      </p:grpSpPr>
+      <p:sp>
+        <p:nvSpPr>
           <p:cNvPr id="2" name="Title 1"/>
           <p:cNvSpPr>
             <a:spLocks noGrp="1"/>
@@ -4785,7 +5433,7 @@
 </p:sld>
 </file>
 
-<file path=ppt/slides/slide5.xml><?xml version="1.0" encoding="utf-8"?>
+<file path=ppt/slides/slide6.xml><?xml version="1.0" encoding="utf-8"?>
 <p:sld xmlns:a="http://schemas.openxmlformats.org/drawingml/2006/main" xmlns:r="http://schemas.openxmlformats.org/officeDocument/2006/relationships" xmlns:p="http://schemas.openxmlformats.org/presentationml/2006/main">
   <p:cSld>
     <p:spTree>
@@ -4936,7 +5584,7 @@
 </p:sld>
 </file>
 
-<file path=ppt/slides/slide6.xml><?xml version="1.0" encoding="utf-8"?>
+<file path=ppt/slides/slide7.xml><?xml version="1.0" encoding="utf-8"?>
 <p:sld xmlns:a="http://schemas.openxmlformats.org/drawingml/2006/main" xmlns:r="http://schemas.openxmlformats.org/officeDocument/2006/relationships" xmlns:p="http://schemas.openxmlformats.org/presentationml/2006/main">
   <p:cSld>
     <p:spTree>
@@ -5199,7 +5847,7 @@
 </p:sld>
 </file>
 
-<file path=ppt/slides/slide7.xml><?xml version="1.0" encoding="utf-8"?>
+<file path=ppt/slides/slide8.xml><?xml version="1.0" encoding="utf-8"?>
 <p:sld xmlns:a="http://schemas.openxmlformats.org/drawingml/2006/main" xmlns:r="http://schemas.openxmlformats.org/officeDocument/2006/relationships" xmlns:p="http://schemas.openxmlformats.org/presentationml/2006/main">
   <p:cSld>
     <p:spTree>
@@ -5368,7 +6016,7 @@
 </p:sld>
 </file>
 
-<file path=ppt/slides/slide8.xml><?xml version="1.0" encoding="utf-8"?>
+<file path=ppt/slides/slide9.xml><?xml version="1.0" encoding="utf-8"?>
 <p:sld xmlns:a="http://schemas.openxmlformats.org/drawingml/2006/main" xmlns:r="http://schemas.openxmlformats.org/officeDocument/2006/relationships" xmlns:p="http://schemas.openxmlformats.org/presentationml/2006/main">
   <p:cSld>
     <p:spTree>
@@ -5636,226 +6284,6 @@
           </a:prstGeom>
         </p:spPr>
       </p:pic>
-    </p:spTree>
-  </p:cSld>
-  <p:clrMapOvr>
-    <a:masterClrMapping/>
-  </p:clrMapOvr>
-</p:sld>
-</file>
-
-<file path=ppt/slides/slide9.xml><?xml version="1.0" encoding="utf-8"?>
-<p:sld xmlns:a="http://schemas.openxmlformats.org/drawingml/2006/main" xmlns:r="http://schemas.openxmlformats.org/officeDocument/2006/relationships" xmlns:p="http://schemas.openxmlformats.org/presentationml/2006/main">
-  <p:cSld>
-    <p:spTree>
-      <p:nvGrpSpPr>
-        <p:cNvPr id="1" name=""/>
-        <p:cNvGrpSpPr/>
-        <p:nvPr/>
-      </p:nvGrpSpPr>
-      <p:grpSpPr>
-        <a:xfrm>
-          <a:off x="0" y="0"/>
-          <a:ext cx="0" cy="0"/>
-          <a:chOff x="0" y="0"/>
-          <a:chExt cx="0" cy="0"/>
-        </a:xfrm>
-      </p:grpSpPr>
-      <p:sp>
-        <p:nvSpPr>
-          <p:cNvPr id="2" name="Title 1"/>
-          <p:cNvSpPr>
-            <a:spLocks noGrp="1"/>
-          </p:cNvSpPr>
-          <p:nvPr>
-            <p:ph type="title"/>
-          </p:nvPr>
-        </p:nvSpPr>
-        <p:spPr/>
-        <p:txBody>
-          <a:bodyPr/>
-          <a:lstStyle/>
-          <a:p>
-            <a:r>
-              <a:rPr dirty="0"/>
-              <a:t>Evolution</a:t>
-            </a:r>
-            <a:r>
-              <a:rPr lang="en-US" dirty="0"/>
-              <a:t> of Ethernet</a:t>
-            </a:r>
-            <a:endParaRPr dirty="0"/>
-          </a:p>
-        </p:txBody>
-      </p:sp>
-      <p:sp>
-        <p:nvSpPr>
-          <p:cNvPr id="3" name="Content Placeholder 2"/>
-          <p:cNvSpPr>
-            <a:spLocks noGrp="1"/>
-          </p:cNvSpPr>
-          <p:nvPr>
-            <p:ph idx="1"/>
-          </p:nvPr>
-        </p:nvSpPr>
-        <p:spPr>
-          <a:xfrm>
-            <a:off x="838200" y="1271588"/>
-            <a:ext cx="10515600" cy="5300661"/>
-          </a:xfrm>
-        </p:spPr>
-        <p:txBody>
-          <a:bodyPr>
-            <a:normAutofit/>
-          </a:bodyPr>
-          <a:lstStyle/>
-          <a:p>
-            <a:r>
-              <a:rPr dirty="0"/>
-              <a:t>Invented at Xerox PARC in 1973</a:t>
-            </a:r>
-            <a:endParaRPr lang="en-US" dirty="0"/>
-          </a:p>
-          <a:p>
-            <a:pPr lvl="1"/>
-            <a:r>
-              <a:rPr dirty="0"/>
-              <a:t>10 Mbps over shared coaxial cable</a:t>
-            </a:r>
-            <a:endParaRPr lang="en-US" dirty="0"/>
-          </a:p>
-          <a:p>
-            <a:pPr lvl="1"/>
-            <a:r>
-              <a:rPr lang="en-US" dirty="0"/>
-              <a:t>Inspired by ALOHA wireless network</a:t>
-            </a:r>
-            <a:endParaRPr dirty="0"/>
-          </a:p>
-          <a:p>
-            <a:r>
-              <a:rPr dirty="0"/>
-              <a:t>CSMA/CD</a:t>
-            </a:r>
-            <a:r>
-              <a:rPr lang="en-US" dirty="0"/>
-              <a:t> – Carrier Sense Multiple Access with Collision Detection</a:t>
-            </a:r>
-          </a:p>
-          <a:p>
-            <a:pPr lvl="1"/>
-            <a:r>
-              <a:rPr lang="en-US" dirty="0"/>
-              <a:t>L</a:t>
-            </a:r>
-            <a:r>
-              <a:rPr dirty="0"/>
-              <a:t>isten </a:t>
-            </a:r>
-            <a:r>
-              <a:rPr lang="en-US" dirty="0"/>
-              <a:t>for idle channel </a:t>
-            </a:r>
-            <a:r>
-              <a:rPr dirty="0"/>
-              <a:t>before transmit</a:t>
-            </a:r>
-            <a:r>
-              <a:rPr lang="en-US" dirty="0"/>
-              <a:t>ting</a:t>
-            </a:r>
-          </a:p>
-          <a:p>
-            <a:pPr lvl="1"/>
-            <a:r>
-              <a:rPr lang="en-US" dirty="0"/>
-              <a:t>B</a:t>
-            </a:r>
-            <a:r>
-              <a:rPr dirty="0"/>
-              <a:t>ackoff exponentially </a:t>
-            </a:r>
-            <a:r>
-              <a:rPr lang="en-US" dirty="0"/>
-              <a:t>if a </a:t>
-            </a:r>
-            <a:r>
-              <a:rPr dirty="0"/>
-              <a:t>collision</a:t>
-            </a:r>
-            <a:r>
-              <a:rPr lang="en-US" dirty="0"/>
-              <a:t> is detected</a:t>
-            </a:r>
-            <a:endParaRPr dirty="0"/>
-          </a:p>
-          <a:p>
-            <a:r>
-              <a:rPr lang="en-US" dirty="0"/>
-              <a:t>Adapted Over Time</a:t>
-            </a:r>
-          </a:p>
-          <a:p>
-            <a:pPr lvl="1"/>
-            <a:r>
-              <a:rPr dirty="0"/>
-              <a:t>10M → 100M → 1G → 10G → 100G → 400G</a:t>
-            </a:r>
-            <a:endParaRPr lang="en-US" dirty="0"/>
-          </a:p>
-          <a:p>
-            <a:pPr lvl="2"/>
-            <a:r>
-              <a:rPr lang="en-US" dirty="0"/>
-              <a:t>Improved encoding</a:t>
-            </a:r>
-          </a:p>
-          <a:p>
-            <a:pPr lvl="2"/>
-            <a:r>
-              <a:rPr lang="en-US" dirty="0"/>
-              <a:t>Improved signaling</a:t>
-            </a:r>
-          </a:p>
-          <a:p>
-            <a:pPr lvl="2"/>
-            <a:r>
-              <a:rPr lang="en-US" dirty="0"/>
-              <a:t>New media (e.g., fiber)</a:t>
-            </a:r>
-          </a:p>
-          <a:p>
-            <a:pPr lvl="1"/>
-            <a:r>
-              <a:rPr lang="en-US" dirty="0"/>
-              <a:t>Multi-Access → Point-to-Point</a:t>
-            </a:r>
-            <a:r>
-              <a:rPr lang="en-US" dirty="0">
-                <a:sym typeface="Wingdings" pitchFamily="2" charset="2"/>
-              </a:rPr>
-              <a:t> (became a switched network)</a:t>
-            </a:r>
-            <a:endParaRPr dirty="0"/>
-          </a:p>
-          <a:p>
-            <a:pPr lvl="1"/>
-            <a:r>
-              <a:rPr lang="en-US" dirty="0"/>
-              <a:t>Always backwards compatible (frame format, 48-bit </a:t>
-            </a:r>
-            <a:r>
-              <a:rPr dirty="0"/>
-              <a:t>address</a:t>
-            </a:r>
-            <a:r>
-              <a:rPr lang="en-US" dirty="0"/>
-              <a:t>es)</a:t>
-            </a:r>
-            <a:endParaRPr dirty="0"/>
-          </a:p>
-        </p:txBody>
-      </p:sp>
     </p:spTree>
   </p:cSld>
   <p:clrMapOvr>

--- a/resources/slides/03_technology.pptx
+++ b/resources/slides/03_technology.pptx
@@ -219,7 +219,7 @@
           <a:p>
             <a:fld id="{2D2CAE3E-F9B4-C94A-AABF-8CE1CAEC439F}" type="datetimeFigureOut">
               <a:rPr lang="en-US" smtClean="0"/>
-              <a:t>9/12/26</a:t>
+              <a:t>9/25/26</a:t>
             </a:fld>
             <a:endParaRPr lang="en-US"/>
           </a:p>
@@ -739,9 +739,9 @@
           <a:bodyPr/>
           <a:lstStyle/>
           <a:p>
-            <a:fld id="{CC015439-64B1-CE4E-8D65-9A05746CEBEF}" type="datetimeFigureOut">
+            <a:fld id="{6AD2823D-FC58-174D-8DA5-18CBC26C240B}" type="datetime1">
               <a:rPr lang="en-US" smtClean="0"/>
-              <a:t>9/12/26</a:t>
+              <a:t>9/25/26</a:t>
             </a:fld>
             <a:endParaRPr lang="en-US"/>
           </a:p>
@@ -768,7 +768,10 @@
           <a:bodyPr/>
           <a:lstStyle/>
           <a:p>
-            <a:endParaRPr lang="en-US"/>
+            <a:r>
+              <a:rPr lang="en-US"/>
+              <a:t>Copyright Peterson &amp; Davie, 20026</a:t>
+            </a:r>
           </a:p>
         </p:txBody>
       </p:sp>
@@ -971,9 +974,9 @@
           <a:bodyPr/>
           <a:lstStyle/>
           <a:p>
-            <a:fld id="{CC015439-64B1-CE4E-8D65-9A05746CEBEF}" type="datetimeFigureOut">
+            <a:fld id="{C1EF77D3-3065-2548-810F-6FD31CF97E9E}" type="datetime1">
               <a:rPr lang="en-US" smtClean="0"/>
-              <a:t>9/12/26</a:t>
+              <a:t>9/25/26</a:t>
             </a:fld>
             <a:endParaRPr lang="en-US"/>
           </a:p>
@@ -1000,7 +1003,10 @@
           <a:bodyPr/>
           <a:lstStyle/>
           <a:p>
-            <a:endParaRPr lang="en-US"/>
+            <a:r>
+              <a:rPr lang="en-US"/>
+              <a:t>Copyright Peterson &amp; Davie, 20026</a:t>
+            </a:r>
           </a:p>
         </p:txBody>
       </p:sp>
@@ -1221,9 +1227,9 @@
           <a:bodyPr/>
           <a:lstStyle/>
           <a:p>
-            <a:fld id="{CC015439-64B1-CE4E-8D65-9A05746CEBEF}" type="datetimeFigureOut">
+            <a:fld id="{57DB0C94-0BDA-7D4B-82D6-6CD8BA8E6C67}" type="datetime1">
               <a:rPr lang="en-US" smtClean="0"/>
-              <a:t>9/12/26</a:t>
+              <a:t>9/25/26</a:t>
             </a:fld>
             <a:endParaRPr lang="en-US"/>
           </a:p>
@@ -1250,7 +1256,10 @@
           <a:bodyPr/>
           <a:lstStyle/>
           <a:p>
-            <a:endParaRPr lang="en-US"/>
+            <a:r>
+              <a:rPr lang="en-US"/>
+              <a:t>Copyright Peterson &amp; Davie, 20026</a:t>
+            </a:r>
           </a:p>
         </p:txBody>
       </p:sp>
@@ -1486,9 +1495,9 @@
           <a:bodyPr/>
           <a:lstStyle/>
           <a:p>
-            <a:fld id="{CC015439-64B1-CE4E-8D65-9A05746CEBEF}" type="datetimeFigureOut">
+            <a:fld id="{86E89D4D-09AE-924D-BFFF-E8DAEA04F49A}" type="datetime1">
               <a:rPr lang="en-US" smtClean="0"/>
-              <a:t>9/12/26</a:t>
+              <a:t>9/25/26</a:t>
             </a:fld>
             <a:endParaRPr lang="en-US"/>
           </a:p>
@@ -1515,7 +1524,10 @@
           <a:bodyPr/>
           <a:lstStyle/>
           <a:p>
-            <a:endParaRPr lang="en-US"/>
+            <a:r>
+              <a:rPr lang="en-US"/>
+              <a:t>Copyright Peterson &amp; Davie, 20026</a:t>
+            </a:r>
           </a:p>
         </p:txBody>
       </p:sp>
@@ -1627,9 +1639,9 @@
           <a:bodyPr/>
           <a:lstStyle/>
           <a:p>
-            <a:fld id="{CC015439-64B1-CE4E-8D65-9A05746CEBEF}" type="datetimeFigureOut">
+            <a:fld id="{48B0DA72-C892-1348-890E-15B045A08A3B}" type="datetime1">
               <a:rPr lang="en-US" smtClean="0"/>
-              <a:t>9/12/26</a:t>
+              <a:t>9/25/26</a:t>
             </a:fld>
             <a:endParaRPr lang="en-US"/>
           </a:p>
@@ -1656,7 +1668,10 @@
           <a:bodyPr/>
           <a:lstStyle/>
           <a:p>
-            <a:endParaRPr lang="en-US"/>
+            <a:r>
+              <a:rPr lang="en-US"/>
+              <a:t>Copyright Peterson &amp; Davie, 20026</a:t>
+            </a:r>
           </a:p>
         </p:txBody>
       </p:sp>
@@ -1830,9 +1845,9 @@
             </a:lvl1pPr>
           </a:lstStyle>
           <a:p>
-            <a:fld id="{CC015439-64B1-CE4E-8D65-9A05746CEBEF}" type="datetimeFigureOut">
+            <a:fld id="{A81EE9AA-732A-664F-A59D-8078D5FCC658}" type="datetime1">
               <a:rPr lang="en-US" smtClean="0"/>
-              <a:t>9/12/26</a:t>
+              <a:t>9/25/26</a:t>
             </a:fld>
             <a:endParaRPr lang="en-US"/>
           </a:p>
@@ -1877,7 +1892,10 @@
             </a:lvl1pPr>
           </a:lstStyle>
           <a:p>
-            <a:endParaRPr lang="en-US"/>
+            <a:r>
+              <a:rPr lang="en-US"/>
+              <a:t>Copyright Peterson &amp; Davie, 20026</a:t>
+            </a:r>
           </a:p>
         </p:txBody>
       </p:sp>
@@ -2033,6 +2051,7 @@
     <p:sldLayoutId id="2147483652" r:id="rId4"/>
     <p:sldLayoutId id="2147483654" r:id="rId5"/>
   </p:sldLayoutIdLst>
+  <p:hf sldNum="0" hdr="0" dt="0"/>
   <p:txStyles>
     <p:titleStyle>
       <a:lvl1pPr algn="l" defTabSz="914400" rtl="0" eaLnBrk="1" latinLnBrk="0" hangingPunct="1">
@@ -2385,6 +2404,34 @@
           </a:p>
         </p:txBody>
       </p:sp>
+      <p:sp>
+        <p:nvSpPr>
+          <p:cNvPr id="4" name="Footer Placeholder 3">
+            <a:extLst>
+              <a:ext uri="{FF2B5EF4-FFF2-40B4-BE49-F238E27FC236}">
+                <a16:creationId xmlns:a16="http://schemas.microsoft.com/office/drawing/2014/main" id="{FBA2187E-68EF-C823-5E5C-CBDAA18AA603}"/>
+              </a:ext>
+            </a:extLst>
+          </p:cNvPr>
+          <p:cNvSpPr>
+            <a:spLocks noGrp="1"/>
+          </p:cNvSpPr>
+          <p:nvPr>
+            <p:ph type="ftr" sz="quarter" idx="11"/>
+          </p:nvPr>
+        </p:nvSpPr>
+        <p:spPr/>
+        <p:txBody>
+          <a:bodyPr/>
+          <a:lstStyle/>
+          <a:p>
+            <a:r>
+              <a:rPr lang="en-US"/>
+              <a:t>Copyright Peterson &amp; Davie, 20026</a:t>
+            </a:r>
+          </a:p>
+        </p:txBody>
+      </p:sp>
     </p:spTree>
   </p:cSld>
   <p:clrMapOvr>
@@ -2605,6 +2652,34 @@
           </a:p>
         </p:txBody>
       </p:sp>
+      <p:sp>
+        <p:nvSpPr>
+          <p:cNvPr id="4" name="Footer Placeholder 3">
+            <a:extLst>
+              <a:ext uri="{FF2B5EF4-FFF2-40B4-BE49-F238E27FC236}">
+                <a16:creationId xmlns:a16="http://schemas.microsoft.com/office/drawing/2014/main" id="{9314A0EA-E610-37EE-7F7E-46B057E8BC1F}"/>
+              </a:ext>
+            </a:extLst>
+          </p:cNvPr>
+          <p:cNvSpPr>
+            <a:spLocks noGrp="1"/>
+          </p:cNvSpPr>
+          <p:nvPr>
+            <p:ph type="ftr" sz="quarter" idx="11"/>
+          </p:nvPr>
+        </p:nvSpPr>
+        <p:spPr/>
+        <p:txBody>
+          <a:bodyPr/>
+          <a:lstStyle/>
+          <a:p>
+            <a:r>
+              <a:rPr lang="en-US"/>
+              <a:t>Copyright Peterson &amp; Davie, 20026</a:t>
+            </a:r>
+          </a:p>
+        </p:txBody>
+      </p:sp>
     </p:spTree>
   </p:cSld>
   <p:clrMapOvr>
@@ -2654,6 +2729,34 @@
             <a:r>
               <a:rPr lang="en-US" dirty="0"/>
               <a:t>Switch Technology</a:t>
+            </a:r>
+          </a:p>
+        </p:txBody>
+      </p:sp>
+      <p:sp>
+        <p:nvSpPr>
+          <p:cNvPr id="3" name="Footer Placeholder 2">
+            <a:extLst>
+              <a:ext uri="{FF2B5EF4-FFF2-40B4-BE49-F238E27FC236}">
+                <a16:creationId xmlns:a16="http://schemas.microsoft.com/office/drawing/2014/main" id="{302CB0B6-0953-D723-5F9B-611D797F391C}"/>
+              </a:ext>
+            </a:extLst>
+          </p:cNvPr>
+          <p:cNvSpPr>
+            <a:spLocks noGrp="1"/>
+          </p:cNvSpPr>
+          <p:nvPr>
+            <p:ph type="ftr" sz="quarter" idx="11"/>
+          </p:nvPr>
+        </p:nvSpPr>
+        <p:spPr/>
+        <p:txBody>
+          <a:bodyPr/>
+          <a:lstStyle/>
+          <a:p>
+            <a:r>
+              <a:rPr lang="en-US"/>
+              <a:t>Copyright Peterson &amp; Davie, 20026</a:t>
             </a:r>
           </a:p>
         </p:txBody>
@@ -2829,6 +2932,34 @@
           </a:p>
         </p:txBody>
       </p:sp>
+      <p:sp>
+        <p:nvSpPr>
+          <p:cNvPr id="4" name="Footer Placeholder 3">
+            <a:extLst>
+              <a:ext uri="{FF2B5EF4-FFF2-40B4-BE49-F238E27FC236}">
+                <a16:creationId xmlns:a16="http://schemas.microsoft.com/office/drawing/2014/main" id="{9347C190-952E-4EBD-68A5-4854944E7A75}"/>
+              </a:ext>
+            </a:extLst>
+          </p:cNvPr>
+          <p:cNvSpPr>
+            <a:spLocks noGrp="1"/>
+          </p:cNvSpPr>
+          <p:nvPr>
+            <p:ph type="ftr" sz="quarter" idx="11"/>
+          </p:nvPr>
+        </p:nvSpPr>
+        <p:spPr/>
+        <p:txBody>
+          <a:bodyPr/>
+          <a:lstStyle/>
+          <a:p>
+            <a:r>
+              <a:rPr lang="en-US"/>
+              <a:t>Copyright Peterson &amp; Davie, 20026</a:t>
+            </a:r>
+          </a:p>
+        </p:txBody>
+      </p:sp>
     </p:spTree>
   </p:cSld>
   <p:clrMapOvr>
@@ -3014,6 +3145,34 @@
           </a:prstGeom>
         </p:spPr>
       </p:pic>
+      <p:sp>
+        <p:nvSpPr>
+          <p:cNvPr id="5" name="Footer Placeholder 4">
+            <a:extLst>
+              <a:ext uri="{FF2B5EF4-FFF2-40B4-BE49-F238E27FC236}">
+                <a16:creationId xmlns:a16="http://schemas.microsoft.com/office/drawing/2014/main" id="{C30682BE-3C66-C675-F471-08697890A5F1}"/>
+              </a:ext>
+            </a:extLst>
+          </p:cNvPr>
+          <p:cNvSpPr>
+            <a:spLocks noGrp="1"/>
+          </p:cNvSpPr>
+          <p:nvPr>
+            <p:ph type="ftr" sz="quarter" idx="11"/>
+          </p:nvPr>
+        </p:nvSpPr>
+        <p:spPr/>
+        <p:txBody>
+          <a:bodyPr/>
+          <a:lstStyle/>
+          <a:p>
+            <a:r>
+              <a:rPr lang="en-US"/>
+              <a:t>Copyright Peterson &amp; Davie, 20026</a:t>
+            </a:r>
+          </a:p>
+        </p:txBody>
+      </p:sp>
     </p:spTree>
   </p:cSld>
   <p:clrMapOvr>
@@ -3251,6 +3410,34 @@
           </a:prstGeom>
         </p:spPr>
       </p:pic>
+      <p:sp>
+        <p:nvSpPr>
+          <p:cNvPr id="5" name="Footer Placeholder 4">
+            <a:extLst>
+              <a:ext uri="{FF2B5EF4-FFF2-40B4-BE49-F238E27FC236}">
+                <a16:creationId xmlns:a16="http://schemas.microsoft.com/office/drawing/2014/main" id="{2DC078B4-96B4-AFF2-50FB-0BEB10383625}"/>
+              </a:ext>
+            </a:extLst>
+          </p:cNvPr>
+          <p:cNvSpPr>
+            <a:spLocks noGrp="1"/>
+          </p:cNvSpPr>
+          <p:nvPr>
+            <p:ph type="ftr" sz="quarter" idx="11"/>
+          </p:nvPr>
+        </p:nvSpPr>
+        <p:spPr/>
+        <p:txBody>
+          <a:bodyPr/>
+          <a:lstStyle/>
+          <a:p>
+            <a:r>
+              <a:rPr lang="en-US"/>
+              <a:t>Copyright Peterson &amp; Davie, 20026</a:t>
+            </a:r>
+          </a:p>
+        </p:txBody>
+      </p:sp>
     </p:spTree>
   </p:cSld>
   <p:clrMapOvr>
@@ -3443,6 +3630,34 @@
           </a:prstGeom>
         </p:spPr>
       </p:pic>
+      <p:sp>
+        <p:nvSpPr>
+          <p:cNvPr id="5" name="Footer Placeholder 4">
+            <a:extLst>
+              <a:ext uri="{FF2B5EF4-FFF2-40B4-BE49-F238E27FC236}">
+                <a16:creationId xmlns:a16="http://schemas.microsoft.com/office/drawing/2014/main" id="{9CB6812E-5101-7BC4-9179-940A12661F2E}"/>
+              </a:ext>
+            </a:extLst>
+          </p:cNvPr>
+          <p:cNvSpPr>
+            <a:spLocks noGrp="1"/>
+          </p:cNvSpPr>
+          <p:nvPr>
+            <p:ph type="ftr" sz="quarter" idx="11"/>
+          </p:nvPr>
+        </p:nvSpPr>
+        <p:spPr/>
+        <p:txBody>
+          <a:bodyPr/>
+          <a:lstStyle/>
+          <a:p>
+            <a:r>
+              <a:rPr lang="en-US"/>
+              <a:t>Copyright Peterson &amp; Davie, 20026</a:t>
+            </a:r>
+          </a:p>
+        </p:txBody>
+      </p:sp>
     </p:spTree>
   </p:cSld>
   <p:clrMapOvr>
@@ -3831,6 +4046,34 @@
           </a:fontRef>
         </p:style>
       </p:cxnSp>
+      <p:sp>
+        <p:nvSpPr>
+          <p:cNvPr id="6" name="Footer Placeholder 5">
+            <a:extLst>
+              <a:ext uri="{FF2B5EF4-FFF2-40B4-BE49-F238E27FC236}">
+                <a16:creationId xmlns:a16="http://schemas.microsoft.com/office/drawing/2014/main" id="{858A10BA-6AB1-62F6-065D-CB2D32F68174}"/>
+              </a:ext>
+            </a:extLst>
+          </p:cNvPr>
+          <p:cNvSpPr>
+            <a:spLocks noGrp="1"/>
+          </p:cNvSpPr>
+          <p:nvPr>
+            <p:ph type="ftr" sz="quarter" idx="11"/>
+          </p:nvPr>
+        </p:nvSpPr>
+        <p:spPr/>
+        <p:txBody>
+          <a:bodyPr/>
+          <a:lstStyle/>
+          <a:p>
+            <a:r>
+              <a:rPr lang="en-US"/>
+              <a:t>Copyright Peterson &amp; Davie, 20026</a:t>
+            </a:r>
+          </a:p>
+        </p:txBody>
+      </p:sp>
     </p:spTree>
   </p:cSld>
   <p:clrMapOvr>
@@ -3950,6 +4193,34 @@
           </a:p>
         </p:txBody>
       </p:sp>
+      <p:sp>
+        <p:nvSpPr>
+          <p:cNvPr id="3" name="Footer Placeholder 2">
+            <a:extLst>
+              <a:ext uri="{FF2B5EF4-FFF2-40B4-BE49-F238E27FC236}">
+                <a16:creationId xmlns:a16="http://schemas.microsoft.com/office/drawing/2014/main" id="{968D5038-80DF-BBF9-BC3E-BF85FE528658}"/>
+              </a:ext>
+            </a:extLst>
+          </p:cNvPr>
+          <p:cNvSpPr>
+            <a:spLocks noGrp="1"/>
+          </p:cNvSpPr>
+          <p:nvPr>
+            <p:ph type="ftr" sz="quarter" idx="11"/>
+          </p:nvPr>
+        </p:nvSpPr>
+        <p:spPr/>
+        <p:txBody>
+          <a:bodyPr/>
+          <a:lstStyle/>
+          <a:p>
+            <a:r>
+              <a:rPr lang="en-US"/>
+              <a:t>Copyright Peterson &amp; Davie, 20026</a:t>
+            </a:r>
+          </a:p>
+        </p:txBody>
+      </p:sp>
     </p:spTree>
     <p:extLst>
       <p:ext uri="{BB962C8B-B14F-4D97-AF65-F5344CB8AC3E}">
@@ -4120,6 +4391,34 @@
           </a:p>
         </p:txBody>
       </p:sp>
+      <p:sp>
+        <p:nvSpPr>
+          <p:cNvPr id="4" name="Footer Placeholder 3">
+            <a:extLst>
+              <a:ext uri="{FF2B5EF4-FFF2-40B4-BE49-F238E27FC236}">
+                <a16:creationId xmlns:a16="http://schemas.microsoft.com/office/drawing/2014/main" id="{BA383369-DE1A-53AD-133A-B8C1ECF88D39}"/>
+              </a:ext>
+            </a:extLst>
+          </p:cNvPr>
+          <p:cNvSpPr>
+            <a:spLocks noGrp="1"/>
+          </p:cNvSpPr>
+          <p:nvPr>
+            <p:ph type="ftr" sz="quarter" idx="11"/>
+          </p:nvPr>
+        </p:nvSpPr>
+        <p:spPr/>
+        <p:txBody>
+          <a:bodyPr/>
+          <a:lstStyle/>
+          <a:p>
+            <a:r>
+              <a:rPr lang="en-US"/>
+              <a:t>Copyright Peterson &amp; Davie, 20026</a:t>
+            </a:r>
+          </a:p>
+        </p:txBody>
+      </p:sp>
     </p:spTree>
   </p:cSld>
   <p:clrMapOvr>
@@ -4267,6 +4566,34 @@
           </a:prstGeom>
         </p:spPr>
       </p:pic>
+      <p:sp>
+        <p:nvSpPr>
+          <p:cNvPr id="5" name="Footer Placeholder 4">
+            <a:extLst>
+              <a:ext uri="{FF2B5EF4-FFF2-40B4-BE49-F238E27FC236}">
+                <a16:creationId xmlns:a16="http://schemas.microsoft.com/office/drawing/2014/main" id="{5D6AF437-0708-A64A-9659-2B1449B4F316}"/>
+              </a:ext>
+            </a:extLst>
+          </p:cNvPr>
+          <p:cNvSpPr>
+            <a:spLocks noGrp="1"/>
+          </p:cNvSpPr>
+          <p:nvPr>
+            <p:ph type="ftr" sz="quarter" idx="11"/>
+          </p:nvPr>
+        </p:nvSpPr>
+        <p:spPr/>
+        <p:txBody>
+          <a:bodyPr/>
+          <a:lstStyle/>
+          <a:p>
+            <a:r>
+              <a:rPr lang="en-US"/>
+              <a:t>Copyright Peterson &amp; Davie, 20026</a:t>
+            </a:r>
+          </a:p>
+        </p:txBody>
+      </p:sp>
     </p:spTree>
   </p:cSld>
   <p:clrMapOvr>
@@ -4579,6 +4906,34 @@
           </a:p>
         </p:txBody>
       </p:sp>
+      <p:sp>
+        <p:nvSpPr>
+          <p:cNvPr id="5" name="Footer Placeholder 4">
+            <a:extLst>
+              <a:ext uri="{FF2B5EF4-FFF2-40B4-BE49-F238E27FC236}">
+                <a16:creationId xmlns:a16="http://schemas.microsoft.com/office/drawing/2014/main" id="{9387B106-7646-3298-AF61-D1019EC495A2}"/>
+              </a:ext>
+            </a:extLst>
+          </p:cNvPr>
+          <p:cNvSpPr>
+            <a:spLocks noGrp="1"/>
+          </p:cNvSpPr>
+          <p:nvPr>
+            <p:ph type="ftr" sz="quarter" idx="11"/>
+          </p:nvPr>
+        </p:nvSpPr>
+        <p:spPr/>
+        <p:txBody>
+          <a:bodyPr/>
+          <a:lstStyle/>
+          <a:p>
+            <a:r>
+              <a:rPr lang="en-US"/>
+              <a:t>Copyright Peterson &amp; Davie, 20026</a:t>
+            </a:r>
+          </a:p>
+        </p:txBody>
+      </p:sp>
     </p:spTree>
   </p:cSld>
   <p:clrMapOvr>
@@ -4628,6 +4983,34 @@
             <a:r>
               <a:rPr lang="en-US" dirty="0"/>
               <a:t>Circuit Switching</a:t>
+            </a:r>
+          </a:p>
+        </p:txBody>
+      </p:sp>
+      <p:sp>
+        <p:nvSpPr>
+          <p:cNvPr id="3" name="Footer Placeholder 2">
+            <a:extLst>
+              <a:ext uri="{FF2B5EF4-FFF2-40B4-BE49-F238E27FC236}">
+                <a16:creationId xmlns:a16="http://schemas.microsoft.com/office/drawing/2014/main" id="{F06BD0A6-1454-D5FB-A027-9765BBCC3503}"/>
+              </a:ext>
+            </a:extLst>
+          </p:cNvPr>
+          <p:cNvSpPr>
+            <a:spLocks noGrp="1"/>
+          </p:cNvSpPr>
+          <p:nvPr>
+            <p:ph type="ftr" sz="quarter" idx="11"/>
+          </p:nvPr>
+        </p:nvSpPr>
+        <p:spPr/>
+        <p:txBody>
+          <a:bodyPr/>
+          <a:lstStyle/>
+          <a:p>
+            <a:r>
+              <a:rPr lang="en-US"/>
+              <a:t>Copyright Peterson &amp; Davie, 20026</a:t>
             </a:r>
           </a:p>
         </p:txBody>
@@ -4797,6 +5180,34 @@
           </a:p>
         </p:txBody>
       </p:sp>
+      <p:sp>
+        <p:nvSpPr>
+          <p:cNvPr id="4" name="Footer Placeholder 3">
+            <a:extLst>
+              <a:ext uri="{FF2B5EF4-FFF2-40B4-BE49-F238E27FC236}">
+                <a16:creationId xmlns:a16="http://schemas.microsoft.com/office/drawing/2014/main" id="{74F2D8B3-391B-44F9-C3F2-84702B0B3535}"/>
+              </a:ext>
+            </a:extLst>
+          </p:cNvPr>
+          <p:cNvSpPr>
+            <a:spLocks noGrp="1"/>
+          </p:cNvSpPr>
+          <p:nvPr>
+            <p:ph type="ftr" sz="quarter" idx="11"/>
+          </p:nvPr>
+        </p:nvSpPr>
+        <p:spPr/>
+        <p:txBody>
+          <a:bodyPr/>
+          <a:lstStyle/>
+          <a:p>
+            <a:r>
+              <a:rPr lang="en-US"/>
+              <a:t>Copyright Peterson &amp; Davie, 20026</a:t>
+            </a:r>
+          </a:p>
+        </p:txBody>
+      </p:sp>
     </p:spTree>
   </p:cSld>
   <p:clrMapOvr>
@@ -4970,6 +5381,34 @@
           </a:prstGeom>
         </p:spPr>
       </p:pic>
+      <p:sp>
+        <p:nvSpPr>
+          <p:cNvPr id="5" name="Footer Placeholder 4">
+            <a:extLst>
+              <a:ext uri="{FF2B5EF4-FFF2-40B4-BE49-F238E27FC236}">
+                <a16:creationId xmlns:a16="http://schemas.microsoft.com/office/drawing/2014/main" id="{D81254BC-96D8-9F19-289E-F2787B0EDBB5}"/>
+              </a:ext>
+            </a:extLst>
+          </p:cNvPr>
+          <p:cNvSpPr>
+            <a:spLocks noGrp="1"/>
+          </p:cNvSpPr>
+          <p:nvPr>
+            <p:ph type="ftr" sz="quarter" idx="11"/>
+          </p:nvPr>
+        </p:nvSpPr>
+        <p:spPr/>
+        <p:txBody>
+          <a:bodyPr/>
+          <a:lstStyle/>
+          <a:p>
+            <a:r>
+              <a:rPr lang="en-US"/>
+              <a:t>Copyright Peterson &amp; Davie, 20026</a:t>
+            </a:r>
+          </a:p>
+        </p:txBody>
+      </p:sp>
     </p:spTree>
   </p:cSld>
   <p:clrMapOvr>
@@ -5110,6 +5549,34 @@
           </a:p>
         </p:txBody>
       </p:sp>
+      <p:sp>
+        <p:nvSpPr>
+          <p:cNvPr id="4" name="Footer Placeholder 3">
+            <a:extLst>
+              <a:ext uri="{FF2B5EF4-FFF2-40B4-BE49-F238E27FC236}">
+                <a16:creationId xmlns:a16="http://schemas.microsoft.com/office/drawing/2014/main" id="{FA9504F6-8EE6-2A78-1F19-00B3B7AB1298}"/>
+              </a:ext>
+            </a:extLst>
+          </p:cNvPr>
+          <p:cNvSpPr>
+            <a:spLocks noGrp="1"/>
+          </p:cNvSpPr>
+          <p:nvPr>
+            <p:ph type="ftr" sz="quarter" idx="11"/>
+          </p:nvPr>
+        </p:nvSpPr>
+        <p:spPr/>
+        <p:txBody>
+          <a:bodyPr/>
+          <a:lstStyle/>
+          <a:p>
+            <a:r>
+              <a:rPr lang="en-US"/>
+              <a:t>Copyright Peterson &amp; Davie, 20026</a:t>
+            </a:r>
+          </a:p>
+        </p:txBody>
+      </p:sp>
     </p:spTree>
   </p:cSld>
   <p:clrMapOvr>
@@ -5237,6 +5704,34 @@
           </a:prstGeom>
         </p:spPr>
       </p:pic>
+      <p:sp>
+        <p:nvSpPr>
+          <p:cNvPr id="5" name="Footer Placeholder 4">
+            <a:extLst>
+              <a:ext uri="{FF2B5EF4-FFF2-40B4-BE49-F238E27FC236}">
+                <a16:creationId xmlns:a16="http://schemas.microsoft.com/office/drawing/2014/main" id="{DFD2A6B4-0FA0-2A2B-0D49-3078BAEED784}"/>
+              </a:ext>
+            </a:extLst>
+          </p:cNvPr>
+          <p:cNvSpPr>
+            <a:spLocks noGrp="1"/>
+          </p:cNvSpPr>
+          <p:nvPr>
+            <p:ph type="ftr" sz="quarter" idx="11"/>
+          </p:nvPr>
+        </p:nvSpPr>
+        <p:spPr/>
+        <p:txBody>
+          <a:bodyPr/>
+          <a:lstStyle/>
+          <a:p>
+            <a:r>
+              <a:rPr lang="en-US"/>
+              <a:t>Copyright Peterson &amp; Davie, 20026</a:t>
+            </a:r>
+          </a:p>
+        </p:txBody>
+      </p:sp>
     </p:spTree>
   </p:cSld>
   <p:clrMapOvr>
@@ -5286,6 +5781,34 @@
             <a:r>
               <a:rPr lang="en-US" dirty="0"/>
               <a:t>Link Technology</a:t>
+            </a:r>
+          </a:p>
+        </p:txBody>
+      </p:sp>
+      <p:sp>
+        <p:nvSpPr>
+          <p:cNvPr id="3" name="Footer Placeholder 2">
+            <a:extLst>
+              <a:ext uri="{FF2B5EF4-FFF2-40B4-BE49-F238E27FC236}">
+                <a16:creationId xmlns:a16="http://schemas.microsoft.com/office/drawing/2014/main" id="{9600B410-66CC-55F7-105B-70371D01B051}"/>
+              </a:ext>
+            </a:extLst>
+          </p:cNvPr>
+          <p:cNvSpPr>
+            <a:spLocks noGrp="1"/>
+          </p:cNvSpPr>
+          <p:nvPr>
+            <p:ph type="ftr" sz="quarter" idx="11"/>
+          </p:nvPr>
+        </p:nvSpPr>
+        <p:spPr/>
+        <p:txBody>
+          <a:bodyPr/>
+          <a:lstStyle/>
+          <a:p>
+            <a:r>
+              <a:rPr lang="en-US"/>
+              <a:t>Copyright Peterson &amp; Davie, 20026</a:t>
             </a:r>
           </a:p>
         </p:txBody>
@@ -5425,6 +5948,34 @@
           </a:p>
         </p:txBody>
       </p:sp>
+      <p:sp>
+        <p:nvSpPr>
+          <p:cNvPr id="4" name="Footer Placeholder 3">
+            <a:extLst>
+              <a:ext uri="{FF2B5EF4-FFF2-40B4-BE49-F238E27FC236}">
+                <a16:creationId xmlns:a16="http://schemas.microsoft.com/office/drawing/2014/main" id="{1DD750B9-B1AC-84D2-4072-F3275B845E45}"/>
+              </a:ext>
+            </a:extLst>
+          </p:cNvPr>
+          <p:cNvSpPr>
+            <a:spLocks noGrp="1"/>
+          </p:cNvSpPr>
+          <p:nvPr>
+            <p:ph type="ftr" sz="quarter" idx="11"/>
+          </p:nvPr>
+        </p:nvSpPr>
+        <p:spPr/>
+        <p:txBody>
+          <a:bodyPr/>
+          <a:lstStyle/>
+          <a:p>
+            <a:r>
+              <a:rPr lang="en-US"/>
+              <a:t>Copyright Peterson &amp; Davie, 20026</a:t>
+            </a:r>
+          </a:p>
+        </p:txBody>
+      </p:sp>
     </p:spTree>
   </p:cSld>
   <p:clrMapOvr>
@@ -5576,6 +6127,34 @@
           </a:prstGeom>
         </p:spPr>
       </p:pic>
+      <p:sp>
+        <p:nvSpPr>
+          <p:cNvPr id="5" name="Footer Placeholder 4">
+            <a:extLst>
+              <a:ext uri="{FF2B5EF4-FFF2-40B4-BE49-F238E27FC236}">
+                <a16:creationId xmlns:a16="http://schemas.microsoft.com/office/drawing/2014/main" id="{B806AA8A-C26A-5964-42F7-943A57E89121}"/>
+              </a:ext>
+            </a:extLst>
+          </p:cNvPr>
+          <p:cNvSpPr>
+            <a:spLocks noGrp="1"/>
+          </p:cNvSpPr>
+          <p:nvPr>
+            <p:ph type="ftr" sz="quarter" idx="11"/>
+          </p:nvPr>
+        </p:nvSpPr>
+        <p:spPr/>
+        <p:txBody>
+          <a:bodyPr/>
+          <a:lstStyle/>
+          <a:p>
+            <a:r>
+              <a:rPr lang="en-US"/>
+              <a:t>Copyright Peterson &amp; Davie, 20026</a:t>
+            </a:r>
+          </a:p>
+        </p:txBody>
+      </p:sp>
     </p:spTree>
   </p:cSld>
   <p:clrMapOvr>
@@ -5839,6 +6418,34 @@
           </a:prstGeom>
         </p:spPr>
       </p:pic>
+      <p:sp>
+        <p:nvSpPr>
+          <p:cNvPr id="5" name="Footer Placeholder 4">
+            <a:extLst>
+              <a:ext uri="{FF2B5EF4-FFF2-40B4-BE49-F238E27FC236}">
+                <a16:creationId xmlns:a16="http://schemas.microsoft.com/office/drawing/2014/main" id="{7FBCA438-9055-CA0E-851C-D247347A9EB0}"/>
+              </a:ext>
+            </a:extLst>
+          </p:cNvPr>
+          <p:cNvSpPr>
+            <a:spLocks noGrp="1"/>
+          </p:cNvSpPr>
+          <p:nvPr>
+            <p:ph type="ftr" sz="quarter" idx="11"/>
+          </p:nvPr>
+        </p:nvSpPr>
+        <p:spPr/>
+        <p:txBody>
+          <a:bodyPr/>
+          <a:lstStyle/>
+          <a:p>
+            <a:r>
+              <a:rPr lang="en-US"/>
+              <a:t>Copyright Peterson &amp; Davie, 20026</a:t>
+            </a:r>
+          </a:p>
+        </p:txBody>
+      </p:sp>
     </p:spTree>
   </p:cSld>
   <p:clrMapOvr>
@@ -6008,6 +6615,34 @@
           </a:prstGeom>
         </p:spPr>
       </p:pic>
+      <p:sp>
+        <p:nvSpPr>
+          <p:cNvPr id="4" name="Footer Placeholder 3">
+            <a:extLst>
+              <a:ext uri="{FF2B5EF4-FFF2-40B4-BE49-F238E27FC236}">
+                <a16:creationId xmlns:a16="http://schemas.microsoft.com/office/drawing/2014/main" id="{BEC5EFF7-6D1D-568B-A4D3-CAB0B522E0A7}"/>
+              </a:ext>
+            </a:extLst>
+          </p:cNvPr>
+          <p:cNvSpPr>
+            <a:spLocks noGrp="1"/>
+          </p:cNvSpPr>
+          <p:nvPr>
+            <p:ph type="ftr" sz="quarter" idx="11"/>
+          </p:nvPr>
+        </p:nvSpPr>
+        <p:spPr/>
+        <p:txBody>
+          <a:bodyPr/>
+          <a:lstStyle/>
+          <a:p>
+            <a:r>
+              <a:rPr lang="en-US"/>
+              <a:t>Copyright Peterson &amp; Davie, 20026</a:t>
+            </a:r>
+          </a:p>
+        </p:txBody>
+      </p:sp>
     </p:spTree>
   </p:cSld>
   <p:clrMapOvr>
@@ -6284,6 +6919,34 @@
           </a:prstGeom>
         </p:spPr>
       </p:pic>
+      <p:sp>
+        <p:nvSpPr>
+          <p:cNvPr id="5" name="Footer Placeholder 4">
+            <a:extLst>
+              <a:ext uri="{FF2B5EF4-FFF2-40B4-BE49-F238E27FC236}">
+                <a16:creationId xmlns:a16="http://schemas.microsoft.com/office/drawing/2014/main" id="{E9C5F1DA-192C-C986-9934-E8C7CEC5C76C}"/>
+              </a:ext>
+            </a:extLst>
+          </p:cNvPr>
+          <p:cNvSpPr>
+            <a:spLocks noGrp="1"/>
+          </p:cNvSpPr>
+          <p:nvPr>
+            <p:ph type="ftr" sz="quarter" idx="11"/>
+          </p:nvPr>
+        </p:nvSpPr>
+        <p:spPr/>
+        <p:txBody>
+          <a:bodyPr/>
+          <a:lstStyle/>
+          <a:p>
+            <a:r>
+              <a:rPr lang="en-US"/>
+              <a:t>Copyright Peterson &amp; Davie, 20026</a:t>
+            </a:r>
+          </a:p>
+        </p:txBody>
+      </p:sp>
     </p:spTree>
   </p:cSld>
   <p:clrMapOvr>
